--- a/Update_Slides/FYP_Weekly_Update_Slides_12March.pptx
+++ b/Update_Slides/FYP_Weekly_Update_Slides_12March.pptx
@@ -228,7 +228,7 @@
           <a:p>
             <a:fld id="{C03BD9BC-DEF3-4382-83D6-5C0A0444C18A}" type="datetimeFigureOut">
               <a:rPr lang="en-SG" smtClean="0"/>
-              <a:t>11/3/2026</a:t>
+              <a:t>16/3/2026</a:t>
             </a:fld>
             <a:endParaRPr lang="en-SG"/>
           </a:p>
@@ -1060,7 +1060,7 @@
           <a:p>
             <a:fld id="{0EAFE32E-95B7-4367-9495-9CBC389572F3}" type="datetimeFigureOut">
               <a:rPr lang="en-SG" smtClean="0"/>
-              <a:t>11/3/2026</a:t>
+              <a:t>16/3/2026</a:t>
             </a:fld>
             <a:endParaRPr lang="en-SG"/>
           </a:p>
@@ -1268,7 +1268,7 @@
           <a:p>
             <a:fld id="{0EAFE32E-95B7-4367-9495-9CBC389572F3}" type="datetimeFigureOut">
               <a:rPr lang="en-SG" smtClean="0"/>
-              <a:t>11/3/2026</a:t>
+              <a:t>16/3/2026</a:t>
             </a:fld>
             <a:endParaRPr lang="en-SG"/>
           </a:p>
@@ -1524,7 +1524,7 @@
           <a:p>
             <a:fld id="{0EAFE32E-95B7-4367-9495-9CBC389572F3}" type="datetimeFigureOut">
               <a:rPr lang="en-SG" smtClean="0"/>
-              <a:t>11/3/2026</a:t>
+              <a:t>16/3/2026</a:t>
             </a:fld>
             <a:endParaRPr lang="en-SG"/>
           </a:p>
@@ -1698,7 +1698,7 @@
           <a:p>
             <a:fld id="{0EAFE32E-95B7-4367-9495-9CBC389572F3}" type="datetimeFigureOut">
               <a:rPr lang="en-SG" smtClean="0"/>
-              <a:t>11/3/2026</a:t>
+              <a:t>16/3/2026</a:t>
             </a:fld>
             <a:endParaRPr lang="en-SG"/>
           </a:p>
@@ -2041,7 +2041,7 @@
           <a:p>
             <a:fld id="{0EAFE32E-95B7-4367-9495-9CBC389572F3}" type="datetimeFigureOut">
               <a:rPr lang="en-SG" smtClean="0"/>
-              <a:t>11/3/2026</a:t>
+              <a:t>16/3/2026</a:t>
             </a:fld>
             <a:endParaRPr lang="en-SG"/>
           </a:p>
@@ -2316,7 +2316,7 @@
           <a:p>
             <a:fld id="{0EAFE32E-95B7-4367-9495-9CBC389572F3}" type="datetimeFigureOut">
               <a:rPr lang="en-SG" smtClean="0"/>
-              <a:t>11/3/2026</a:t>
+              <a:t>16/3/2026</a:t>
             </a:fld>
             <a:endParaRPr lang="en-SG"/>
           </a:p>
@@ -2695,7 +2695,7 @@
           <a:p>
             <a:fld id="{0EAFE32E-95B7-4367-9495-9CBC389572F3}" type="datetimeFigureOut">
               <a:rPr lang="en-SG" smtClean="0"/>
-              <a:t>11/3/2026</a:t>
+              <a:t>16/3/2026</a:t>
             </a:fld>
             <a:endParaRPr lang="en-SG"/>
           </a:p>
@@ -2813,7 +2813,7 @@
           <a:p>
             <a:fld id="{0EAFE32E-95B7-4367-9495-9CBC389572F3}" type="datetimeFigureOut">
               <a:rPr lang="en-SG" smtClean="0"/>
-              <a:t>11/3/2026</a:t>
+              <a:t>16/3/2026</a:t>
             </a:fld>
             <a:endParaRPr lang="en-SG"/>
           </a:p>
@@ -2984,7 +2984,7 @@
           <a:p>
             <a:fld id="{0EAFE32E-95B7-4367-9495-9CBC389572F3}" type="datetimeFigureOut">
               <a:rPr lang="en-SG" smtClean="0"/>
-              <a:t>11/3/2026</a:t>
+              <a:t>16/3/2026</a:t>
             </a:fld>
             <a:endParaRPr lang="en-SG"/>
           </a:p>
@@ -3338,7 +3338,7 @@
           <a:p>
             <a:fld id="{0EAFE32E-95B7-4367-9495-9CBC389572F3}" type="datetimeFigureOut">
               <a:rPr lang="en-SG" smtClean="0"/>
-              <a:t>11/3/2026</a:t>
+              <a:t>16/3/2026</a:t>
             </a:fld>
             <a:endParaRPr lang="en-SG"/>
           </a:p>
@@ -3720,7 +3720,7 @@
           <a:p>
             <a:fld id="{0EAFE32E-95B7-4367-9495-9CBC389572F3}" type="datetimeFigureOut">
               <a:rPr lang="en-SG" smtClean="0"/>
-              <a:t>11/3/2026</a:t>
+              <a:t>16/3/2026</a:t>
             </a:fld>
             <a:endParaRPr lang="en-SG"/>
           </a:p>
@@ -4021,7 +4021,7 @@
           <a:p>
             <a:fld id="{0EAFE32E-95B7-4367-9495-9CBC389572F3}" type="datetimeFigureOut">
               <a:rPr lang="en-SG" smtClean="0"/>
-              <a:t>11/3/2026</a:t>
+              <a:t>16/3/2026</a:t>
             </a:fld>
             <a:endParaRPr lang="en-SG"/>
           </a:p>
@@ -4849,8 +4849,8 @@
           </a:p>
         </p:txBody>
       </p:sp>
-      <mc:AlternateContent xmlns:mc="http://schemas.openxmlformats.org/markup-compatibility/2006">
-        <mc:Choice xmlns:a14="http://schemas.microsoft.com/office/drawing/2010/main" Requires="a14">
+      <mc:AlternateContent xmlns:mc="http://schemas.openxmlformats.org/markup-compatibility/2006" xmlns:a14="http://schemas.microsoft.com/office/drawing/2010/main">
+        <mc:Choice Requires="a14">
           <p:graphicFrame>
             <p:nvGraphicFramePr>
               <p:cNvPr id="5" name="Table 4">
@@ -5475,7 +5475,7 @@
             </a:graphic>
           </p:graphicFrame>
         </mc:Choice>
-        <mc:Fallback>
+        <mc:Fallback xmlns="">
           <p:graphicFrame>
             <p:nvGraphicFramePr>
               <p:cNvPr id="5" name="Table 4">
@@ -6065,7 +6065,11 @@
               <a:t>Efficiency and Purity from </a:t>
             </a:r>
             <a:r>
-              <a:rPr lang="en-US" b="1" dirty="0"/>
+              <a:rPr lang="en-US" b="1" dirty="0">
+                <a:solidFill>
+                  <a:srgbClr val="FF0000"/>
+                </a:solidFill>
+              </a:rPr>
               <a:t>BNB</a:t>
             </a:r>
             <a:r>
@@ -6076,8 +6080,8 @@
           </a:p>
         </p:txBody>
       </p:sp>
-      <mc:AlternateContent xmlns:mc="http://schemas.openxmlformats.org/markup-compatibility/2006">
-        <mc:Choice xmlns:a14="http://schemas.microsoft.com/office/drawing/2010/main" Requires="a14">
+      <mc:AlternateContent xmlns:mc="http://schemas.openxmlformats.org/markup-compatibility/2006" xmlns:a14="http://schemas.microsoft.com/office/drawing/2010/main">
+        <mc:Choice Requires="a14">
           <p:graphicFrame>
             <p:nvGraphicFramePr>
               <p:cNvPr id="3" name="Table 2">
@@ -6753,7 +6757,7 @@
             </a:graphic>
           </p:graphicFrame>
         </mc:Choice>
-        <mc:Fallback>
+        <mc:Fallback xmlns="">
           <p:graphicFrame>
             <p:nvGraphicFramePr>
               <p:cNvPr id="3" name="Table 2">
@@ -7394,7 +7398,11 @@
               <a:t>Efficiency and Purity from </a:t>
             </a:r>
             <a:r>
-              <a:rPr lang="en-US" b="1" dirty="0" err="1"/>
+              <a:rPr lang="en-US" b="1" dirty="0" err="1">
+                <a:solidFill>
+                  <a:srgbClr val="FF0000"/>
+                </a:solidFill>
+              </a:rPr>
               <a:t>NuMI</a:t>
             </a:r>
             <a:r>
@@ -7588,7 +7596,11 @@
               <a:t>Truth to Reco confusion matrix from </a:t>
             </a:r>
             <a:r>
-              <a:rPr lang="en-US" b="1" dirty="0" err="1"/>
+              <a:rPr lang="en-US" b="1" dirty="0" err="1">
+                <a:solidFill>
+                  <a:srgbClr val="FF0000"/>
+                </a:solidFill>
+              </a:rPr>
               <a:t>NuMI</a:t>
             </a:r>
             <a:r>
@@ -7633,7 +7645,11 @@
               <a:t>Truth to Reco confusion matrix from </a:t>
             </a:r>
             <a:r>
-              <a:rPr lang="en-US" b="1" dirty="0"/>
+              <a:rPr lang="en-US" b="1" dirty="0">
+                <a:solidFill>
+                  <a:srgbClr val="FF0000"/>
+                </a:solidFill>
+              </a:rPr>
               <a:t>BNB</a:t>
             </a:r>
             <a:r>
@@ -7831,7 +7847,11 @@
               <a:t>Reco to Truth confusion matrix from </a:t>
             </a:r>
             <a:r>
-              <a:rPr lang="en-US" b="1" dirty="0" err="1"/>
+              <a:rPr lang="en-US" b="1" dirty="0" err="1">
+                <a:solidFill>
+                  <a:srgbClr val="FF0000"/>
+                </a:solidFill>
+              </a:rPr>
               <a:t>NuMI</a:t>
             </a:r>
             <a:r>
@@ -7876,7 +7896,11 @@
               <a:t>Reco to Truth confusion matrix from </a:t>
             </a:r>
             <a:r>
-              <a:rPr lang="en-US" b="1" dirty="0"/>
+              <a:rPr lang="en-US" b="1" dirty="0">
+                <a:solidFill>
+                  <a:srgbClr val="FF0000"/>
+                </a:solidFill>
+              </a:rPr>
               <a:t>BNB</a:t>
             </a:r>
             <a:r>
@@ -8298,8 +8322,8 @@
         </p:nvSpPr>
         <p:spPr>
           <a:xfrm>
-            <a:off x="1395550" y="5866688"/>
-            <a:ext cx="3465485" cy="307777"/>
+            <a:off x="1270507" y="5871234"/>
+            <a:ext cx="3961541" cy="369332"/>
           </a:xfrm>
           <a:prstGeom prst="rect">
             <a:avLst/>
@@ -8312,9 +8336,22 @@
           </a:bodyPr>
           <a:lstStyle/>
           <a:p>
+            <a:pPr algn="ctr"/>
             <a:r>
               <a:rPr lang="en-US" sz="1400" b="1" dirty="0"/>
-              <a:t>Interaction vertex in x-axis from lane’s paper</a:t>
+              <a:t>Interaction vertex in x-axis from </a:t>
+            </a:r>
+            <a:r>
+              <a:rPr lang="en-US" b="1" dirty="0" err="1">
+                <a:solidFill>
+                  <a:srgbClr val="FF0000"/>
+                </a:solidFill>
+              </a:rPr>
+              <a:t>NuMI</a:t>
+            </a:r>
+            <a:r>
+              <a:rPr lang="en-US" sz="1400" b="1" dirty="0"/>
+              <a:t> selection</a:t>
             </a:r>
             <a:endParaRPr lang="en-SG" sz="1400" b="1" dirty="0"/>
           </a:p>
@@ -8334,8 +8371,8 @@
         </p:nvSpPr>
         <p:spPr>
           <a:xfrm>
-            <a:off x="7330967" y="5907550"/>
-            <a:ext cx="3771842" cy="307777"/>
+            <a:off x="7054801" y="5907549"/>
+            <a:ext cx="3771842" cy="369332"/>
           </a:xfrm>
           <a:prstGeom prst="rect">
             <a:avLst/>
@@ -8350,7 +8387,19 @@
           <a:p>
             <a:r>
               <a:rPr lang="en-US" sz="1400" b="1" dirty="0"/>
-              <a:t>Interaction vertex in x-axis from my BNB sample</a:t>
+              <a:t>Interaction vertex in x-axis from </a:t>
+            </a:r>
+            <a:r>
+              <a:rPr lang="en-US" b="1" dirty="0">
+                <a:solidFill>
+                  <a:srgbClr val="FF0000"/>
+                </a:solidFill>
+              </a:rPr>
+              <a:t>BNB</a:t>
+            </a:r>
+            <a:r>
+              <a:rPr lang="en-US" sz="1400" b="1" dirty="0"/>
+              <a:t> selection</a:t>
             </a:r>
             <a:endParaRPr lang="en-SG" sz="1400" b="1" dirty="0"/>
           </a:p>
@@ -8358,10 +8407,10 @@
       </p:sp>
       <p:pic>
         <p:nvPicPr>
-          <p:cNvPr id="6" name="Picture 5">
+          <p:cNvPr id="7" name="Picture 6">
             <a:extLst>
               <a:ext uri="{FF2B5EF4-FFF2-40B4-BE49-F238E27FC236}">
-                <a16:creationId xmlns:a16="http://schemas.microsoft.com/office/drawing/2014/main" id="{13AA2A3D-282B-5648-1C73-F45FFFDA34A5}"/>
+                <a16:creationId xmlns:a16="http://schemas.microsoft.com/office/drawing/2014/main" id="{55D9FBC7-2661-2864-C572-1615606BEA3E}"/>
               </a:ext>
             </a:extLst>
           </p:cNvPr>
@@ -8378,8 +8427,8 @@
         </p:blipFill>
         <p:spPr>
           <a:xfrm>
-            <a:off x="6330610" y="2548181"/>
-            <a:ext cx="5220225" cy="3359369"/>
+            <a:off x="6330611" y="2548180"/>
+            <a:ext cx="5250933" cy="3359369"/>
           </a:xfrm>
           <a:prstGeom prst="rect">
             <a:avLst/>
@@ -8391,7 +8440,7 @@
           <p:cNvPr id="9" name="Picture 8">
             <a:extLst>
               <a:ext uri="{FF2B5EF4-FFF2-40B4-BE49-F238E27FC236}">
-                <a16:creationId xmlns:a16="http://schemas.microsoft.com/office/drawing/2014/main" id="{6577BD5A-9BDA-A1E0-449C-D98B8B992847}"/>
+                <a16:creationId xmlns:a16="http://schemas.microsoft.com/office/drawing/2014/main" id="{617CB798-6089-526E-80FC-798BB49757EE}"/>
               </a:ext>
             </a:extLst>
           </p:cNvPr>
@@ -8408,8 +8457,8 @@
         </p:blipFill>
         <p:spPr>
           <a:xfrm>
-            <a:off x="570831" y="2597613"/>
-            <a:ext cx="5114924" cy="3309937"/>
+            <a:off x="610456" y="2548179"/>
+            <a:ext cx="5250933" cy="3359369"/>
           </a:xfrm>
           <a:prstGeom prst="rect">
             <a:avLst/>
@@ -8531,8 +8580,8 @@
         </p:nvSpPr>
         <p:spPr>
           <a:xfrm>
-            <a:off x="1395550" y="5866688"/>
-            <a:ext cx="3555141" cy="307777"/>
+            <a:off x="1135348" y="5835656"/>
+            <a:ext cx="4164741" cy="369332"/>
           </a:xfrm>
           <a:prstGeom prst="rect">
             <a:avLst/>
@@ -8545,9 +8594,22 @@
           </a:bodyPr>
           <a:lstStyle/>
           <a:p>
+            <a:pPr algn="ctr"/>
             <a:r>
               <a:rPr lang="en-US" sz="1400" b="1" dirty="0"/>
-              <a:t>Interaction vertex in Y-axis from lane’s paper</a:t>
+              <a:t>Interaction vertex in Y-axis from </a:t>
+            </a:r>
+            <a:r>
+              <a:rPr lang="en-US" b="1" dirty="0" err="1">
+                <a:solidFill>
+                  <a:srgbClr val="FF0000"/>
+                </a:solidFill>
+              </a:rPr>
+              <a:t>NuMI</a:t>
+            </a:r>
+            <a:r>
+              <a:rPr lang="en-US" sz="1400" b="1" dirty="0"/>
+              <a:t> selection</a:t>
             </a:r>
             <a:endParaRPr lang="en-SG" sz="1400" b="1" dirty="0"/>
           </a:p>
@@ -8567,8 +8629,8 @@
         </p:nvSpPr>
         <p:spPr>
           <a:xfrm>
-            <a:off x="7330967" y="5907550"/>
-            <a:ext cx="3771842" cy="307777"/>
+            <a:off x="7088361" y="5841137"/>
+            <a:ext cx="3771842" cy="369332"/>
           </a:xfrm>
           <a:prstGeom prst="rect">
             <a:avLst/>
@@ -8581,9 +8643,22 @@
           </a:bodyPr>
           <a:lstStyle/>
           <a:p>
+            <a:pPr algn="ctr"/>
             <a:r>
               <a:rPr lang="en-US" sz="1400" b="1" dirty="0"/>
-              <a:t>Interaction vertex in Y-axis from my BNB sample</a:t>
+              <a:t>Interaction vertex in Y-axis from </a:t>
+            </a:r>
+            <a:r>
+              <a:rPr lang="en-US" b="1" dirty="0">
+                <a:solidFill>
+                  <a:srgbClr val="FF0000"/>
+                </a:solidFill>
+              </a:rPr>
+              <a:t>BNB</a:t>
+            </a:r>
+            <a:r>
+              <a:rPr lang="en-US" sz="1400" b="1" dirty="0"/>
+              <a:t> selection</a:t>
             </a:r>
             <a:endParaRPr lang="en-SG" sz="1400" b="1" dirty="0"/>
           </a:p>
@@ -8594,7 +8669,7 @@
           <p:cNvPr id="5" name="Picture 4">
             <a:extLst>
               <a:ext uri="{FF2B5EF4-FFF2-40B4-BE49-F238E27FC236}">
-                <a16:creationId xmlns:a16="http://schemas.microsoft.com/office/drawing/2014/main" id="{A32E8E56-E350-91F7-2108-04ECAA498A39}"/>
+                <a16:creationId xmlns:a16="http://schemas.microsoft.com/office/drawing/2014/main" id="{6B90A1A7-8F82-7CFB-32CF-FF1A76276903}"/>
               </a:ext>
             </a:extLst>
           </p:cNvPr>
@@ -8611,8 +8686,8 @@
         </p:blipFill>
         <p:spPr>
           <a:xfrm>
-            <a:off x="706897" y="2609565"/>
-            <a:ext cx="5019648" cy="3231573"/>
+            <a:off x="6463463" y="2609564"/>
+            <a:ext cx="5051179" cy="3231573"/>
           </a:xfrm>
           <a:prstGeom prst="rect">
             <a:avLst/>
@@ -8621,10 +8696,10 @@
       </p:pic>
       <p:pic>
         <p:nvPicPr>
-          <p:cNvPr id="13" name="Picture 12">
+          <p:cNvPr id="7" name="Picture 6">
             <a:extLst>
               <a:ext uri="{FF2B5EF4-FFF2-40B4-BE49-F238E27FC236}">
-                <a16:creationId xmlns:a16="http://schemas.microsoft.com/office/drawing/2014/main" id="{2E1A537E-6C57-AA90-4EED-C1532731497A}"/>
+                <a16:creationId xmlns:a16="http://schemas.microsoft.com/office/drawing/2014/main" id="{5A87ADF5-4CFF-BC3B-ABC7-7A19D6650E17}"/>
               </a:ext>
             </a:extLst>
           </p:cNvPr>
@@ -8641,8 +8716,8 @@
         </p:blipFill>
         <p:spPr>
           <a:xfrm>
-            <a:off x="6463462" y="2609565"/>
-            <a:ext cx="5021641" cy="3231573"/>
+            <a:off x="677358" y="2604083"/>
+            <a:ext cx="5051179" cy="3231573"/>
           </a:xfrm>
           <a:prstGeom prst="rect">
             <a:avLst/>
@@ -8764,8 +8839,8 @@
         </p:nvSpPr>
         <p:spPr>
           <a:xfrm>
-            <a:off x="1395550" y="5866688"/>
-            <a:ext cx="3555141" cy="307777"/>
+            <a:off x="1107493" y="5866687"/>
+            <a:ext cx="4026195" cy="369332"/>
           </a:xfrm>
           <a:prstGeom prst="rect">
             <a:avLst/>
@@ -8778,9 +8853,22 @@
           </a:bodyPr>
           <a:lstStyle/>
           <a:p>
+            <a:pPr algn="ctr"/>
             <a:r>
               <a:rPr lang="en-US" sz="1400" b="1" dirty="0"/>
-              <a:t>Interaction vertex in Z-axis from lane’s paper</a:t>
+              <a:t>Interaction vertex in Z-axis from </a:t>
+            </a:r>
+            <a:r>
+              <a:rPr lang="en-US" b="1" dirty="0" err="1">
+                <a:solidFill>
+                  <a:srgbClr val="FF0000"/>
+                </a:solidFill>
+              </a:rPr>
+              <a:t>NuMI</a:t>
+            </a:r>
+            <a:r>
+              <a:rPr lang="en-US" sz="1400" b="1" dirty="0"/>
+              <a:t> selection</a:t>
             </a:r>
             <a:endParaRPr lang="en-SG" sz="1400" b="1" dirty="0"/>
           </a:p>
@@ -8800,8 +8888,8 @@
         </p:nvSpPr>
         <p:spPr>
           <a:xfrm>
-            <a:off x="7330967" y="5907550"/>
-            <a:ext cx="3771842" cy="307777"/>
+            <a:off x="7185489" y="5868283"/>
+            <a:ext cx="3771842" cy="369332"/>
           </a:xfrm>
           <a:prstGeom prst="rect">
             <a:avLst/>
@@ -8814,9 +8902,22 @@
           </a:bodyPr>
           <a:lstStyle/>
           <a:p>
+            <a:pPr algn="ctr"/>
             <a:r>
               <a:rPr lang="en-US" sz="1400" b="1" dirty="0"/>
-              <a:t>Interaction vertex in Z-axis from my BNB sample</a:t>
+              <a:t>Interaction vertex in Z-axis from </a:t>
+            </a:r>
+            <a:r>
+              <a:rPr lang="en-US" b="1" dirty="0">
+                <a:solidFill>
+                  <a:srgbClr val="FF0000"/>
+                </a:solidFill>
+              </a:rPr>
+              <a:t>BNB</a:t>
+            </a:r>
+            <a:r>
+              <a:rPr lang="en-US" sz="1400" b="1" dirty="0"/>
+              <a:t> selection</a:t>
             </a:r>
             <a:endParaRPr lang="en-SG" sz="1400" b="1" dirty="0"/>
           </a:p>
@@ -8824,10 +8925,10 @@
       </p:sp>
       <p:pic>
         <p:nvPicPr>
-          <p:cNvPr id="6" name="Picture 5">
+          <p:cNvPr id="3" name="Picture 2">
             <a:extLst>
               <a:ext uri="{FF2B5EF4-FFF2-40B4-BE49-F238E27FC236}">
-                <a16:creationId xmlns:a16="http://schemas.microsoft.com/office/drawing/2014/main" id="{C9EF778C-26CD-6627-08BC-EB1E9CB97E86}"/>
+                <a16:creationId xmlns:a16="http://schemas.microsoft.com/office/drawing/2014/main" id="{BB461715-2381-61A2-8A34-2A003666F90C}"/>
               </a:ext>
             </a:extLst>
           </p:cNvPr>
@@ -8844,8 +8945,8 @@
         </p:blipFill>
         <p:spPr>
           <a:xfrm>
-            <a:off x="6465457" y="2512673"/>
-            <a:ext cx="5211906" cy="3354015"/>
+            <a:off x="6465456" y="2532286"/>
+            <a:ext cx="5211906" cy="3334401"/>
           </a:xfrm>
           <a:prstGeom prst="rect">
             <a:avLst/>
@@ -8854,10 +8955,10 @@
       </p:pic>
       <p:pic>
         <p:nvPicPr>
-          <p:cNvPr id="9" name="Picture 8">
+          <p:cNvPr id="7" name="Picture 6">
             <a:extLst>
               <a:ext uri="{FF2B5EF4-FFF2-40B4-BE49-F238E27FC236}">
-                <a16:creationId xmlns:a16="http://schemas.microsoft.com/office/drawing/2014/main" id="{2C282A76-3797-B0B1-23C7-6B66A2F79476}"/>
+                <a16:creationId xmlns:a16="http://schemas.microsoft.com/office/drawing/2014/main" id="{54FA6896-55E2-DC1F-587A-D2E96CFB839B}"/>
               </a:ext>
             </a:extLst>
           </p:cNvPr>
@@ -8874,8 +8975,8 @@
         </p:blipFill>
         <p:spPr>
           <a:xfrm>
-            <a:off x="514638" y="2449568"/>
-            <a:ext cx="5211906" cy="3417120"/>
+            <a:off x="514637" y="2532286"/>
+            <a:ext cx="5211906" cy="3334401"/>
           </a:xfrm>
           <a:prstGeom prst="rect">
             <a:avLst/>
@@ -8997,8 +9098,8 @@
         </p:nvSpPr>
         <p:spPr>
           <a:xfrm>
-            <a:off x="1395550" y="5866688"/>
-            <a:ext cx="3555141" cy="307777"/>
+            <a:off x="1499402" y="5907549"/>
+            <a:ext cx="3555141" cy="369332"/>
           </a:xfrm>
           <a:prstGeom prst="rect">
             <a:avLst/>
@@ -9011,9 +9112,22 @@
           </a:bodyPr>
           <a:lstStyle/>
           <a:p>
+            <a:pPr algn="ctr"/>
             <a:r>
               <a:rPr lang="en-US" sz="1400" b="1" dirty="0"/>
-              <a:t>Muon length from lane’s paper</a:t>
+              <a:t>Muon length from </a:t>
+            </a:r>
+            <a:r>
+              <a:rPr lang="en-US" b="1" dirty="0" err="1">
+                <a:solidFill>
+                  <a:srgbClr val="FF0000"/>
+                </a:solidFill>
+              </a:rPr>
+              <a:t>NuMI</a:t>
+            </a:r>
+            <a:r>
+              <a:rPr lang="en-US" sz="1400" b="1" dirty="0"/>
+              <a:t> selection</a:t>
             </a:r>
             <a:endParaRPr lang="en-SG" sz="1400" b="1" dirty="0"/>
           </a:p>
@@ -9033,8 +9147,8 @@
         </p:nvSpPr>
         <p:spPr>
           <a:xfrm>
-            <a:off x="7330967" y="5907550"/>
-            <a:ext cx="3771842" cy="307777"/>
+            <a:off x="7137458" y="5907550"/>
+            <a:ext cx="3771842" cy="369332"/>
           </a:xfrm>
           <a:prstGeom prst="rect">
             <a:avLst/>
@@ -9047,9 +9161,22 @@
           </a:bodyPr>
           <a:lstStyle/>
           <a:p>
+            <a:pPr algn="ctr"/>
             <a:r>
               <a:rPr lang="en-US" sz="1400" b="1" dirty="0"/>
-              <a:t>Muon length from my BNB sample</a:t>
+              <a:t>Muon length from </a:t>
+            </a:r>
+            <a:r>
+              <a:rPr lang="en-US" b="1" dirty="0">
+                <a:solidFill>
+                  <a:srgbClr val="FF0000"/>
+                </a:solidFill>
+              </a:rPr>
+              <a:t>BNB</a:t>
+            </a:r>
+            <a:r>
+              <a:rPr lang="en-US" sz="1400" b="1" dirty="0"/>
+              <a:t> selection</a:t>
             </a:r>
             <a:endParaRPr lang="en-SG" sz="1400" b="1" dirty="0"/>
           </a:p>
@@ -9057,10 +9184,10 @@
       </p:sp>
       <p:pic>
         <p:nvPicPr>
-          <p:cNvPr id="5" name="Picture 4">
+          <p:cNvPr id="12" name="Picture 11">
             <a:extLst>
               <a:ext uri="{FF2B5EF4-FFF2-40B4-BE49-F238E27FC236}">
-                <a16:creationId xmlns:a16="http://schemas.microsoft.com/office/drawing/2014/main" id="{C9B0FF95-E8FE-1322-8F9A-D30D1BFD03A3}"/>
+                <a16:creationId xmlns:a16="http://schemas.microsoft.com/office/drawing/2014/main" id="{90D9C6DF-5128-9824-29EE-EA9C832F1109}"/>
               </a:ext>
             </a:extLst>
           </p:cNvPr>
@@ -9077,8 +9204,8 @@
         </p:blipFill>
         <p:spPr>
           <a:xfrm>
-            <a:off x="1255467" y="2475180"/>
-            <a:ext cx="3593624" cy="3429000"/>
+            <a:off x="6329683" y="2440599"/>
+            <a:ext cx="5419088" cy="3466949"/>
           </a:xfrm>
           <a:prstGeom prst="rect">
             <a:avLst/>
@@ -9087,10 +9214,10 @@
       </p:pic>
       <p:pic>
         <p:nvPicPr>
-          <p:cNvPr id="8" name="Picture 7">
+          <p:cNvPr id="16" name="Picture 15">
             <a:extLst>
               <a:ext uri="{FF2B5EF4-FFF2-40B4-BE49-F238E27FC236}">
-                <a16:creationId xmlns:a16="http://schemas.microsoft.com/office/drawing/2014/main" id="{A53A016E-0351-067D-ABEE-19B9AC3FAFC7}"/>
+                <a16:creationId xmlns:a16="http://schemas.microsoft.com/office/drawing/2014/main" id="{6A70595B-408B-8D4A-D0DC-D0BAFCF6622B}"/>
               </a:ext>
             </a:extLst>
           </p:cNvPr>
@@ -9107,8 +9234,8 @@
         </p:blipFill>
         <p:spPr>
           <a:xfrm>
-            <a:off x="6126480" y="2437231"/>
-            <a:ext cx="5387398" cy="3466949"/>
+            <a:off x="443229" y="2440599"/>
+            <a:ext cx="5419088" cy="3466949"/>
           </a:xfrm>
           <a:prstGeom prst="rect">
             <a:avLst/>
@@ -9233,8 +9360,8 @@
         </p:nvSpPr>
         <p:spPr>
           <a:xfrm>
-            <a:off x="1097279" y="5891439"/>
-            <a:ext cx="4137032" cy="307777"/>
+            <a:off x="937866" y="5891438"/>
+            <a:ext cx="4620030" cy="369332"/>
           </a:xfrm>
           <a:prstGeom prst="rect">
             <a:avLst/>
@@ -9247,13 +9374,26 @@
           </a:bodyPr>
           <a:lstStyle/>
           <a:p>
+            <a:pPr algn="ctr"/>
             <a:r>
               <a:rPr lang="en-SG" sz="1400" b="1" dirty="0"/>
               <a:t>leading photon conversion distance </a:t>
             </a:r>
             <a:r>
               <a:rPr lang="en-US" sz="1400" b="1" dirty="0"/>
-              <a:t>from lane’s paper</a:t>
+              <a:t>from </a:t>
+            </a:r>
+            <a:r>
+              <a:rPr lang="en-US" b="1" dirty="0" err="1">
+                <a:solidFill>
+                  <a:srgbClr val="FF0000"/>
+                </a:solidFill>
+              </a:rPr>
+              <a:t>NuMI</a:t>
+            </a:r>
+            <a:r>
+              <a:rPr lang="en-US" sz="1400" b="1" dirty="0"/>
+              <a:t> selection</a:t>
             </a:r>
             <a:endParaRPr lang="en-SG" sz="1400" b="1" dirty="0"/>
           </a:p>
@@ -9273,8 +9413,8 @@
         </p:nvSpPr>
         <p:spPr>
           <a:xfrm>
-            <a:off x="6582631" y="5891438"/>
-            <a:ext cx="4436160" cy="307777"/>
+            <a:off x="6726039" y="5891438"/>
+            <a:ext cx="4436160" cy="369332"/>
           </a:xfrm>
           <a:prstGeom prst="rect">
             <a:avLst/>
@@ -9287,13 +9427,26 @@
           </a:bodyPr>
           <a:lstStyle/>
           <a:p>
+            <a:pPr algn="ctr"/>
             <a:r>
               <a:rPr lang="en-SG" sz="1400" b="1" dirty="0"/>
               <a:t>leading photon conversion distance </a:t>
             </a:r>
             <a:r>
               <a:rPr lang="en-US" sz="1400" b="1" dirty="0"/>
-              <a:t>from my BNB sample</a:t>
+              <a:t>from </a:t>
+            </a:r>
+            <a:r>
+              <a:rPr lang="en-US" b="1" dirty="0">
+                <a:solidFill>
+                  <a:srgbClr val="FF0000"/>
+                </a:solidFill>
+              </a:rPr>
+              <a:t>BNB</a:t>
+            </a:r>
+            <a:r>
+              <a:rPr lang="en-US" sz="1400" b="1" dirty="0"/>
+              <a:t> selection</a:t>
             </a:r>
             <a:endParaRPr lang="en-SG" sz="1400" b="1" dirty="0"/>
           </a:p>
@@ -9304,7 +9457,7 @@
           <p:cNvPr id="6" name="Picture 5">
             <a:extLst>
               <a:ext uri="{FF2B5EF4-FFF2-40B4-BE49-F238E27FC236}">
-                <a16:creationId xmlns:a16="http://schemas.microsoft.com/office/drawing/2014/main" id="{C365C46F-6FAF-A167-C81F-796B722F18F1}"/>
+                <a16:creationId xmlns:a16="http://schemas.microsoft.com/office/drawing/2014/main" id="{6AD04FF4-0200-23BA-7D23-BD43B23DC730}"/>
               </a:ext>
             </a:extLst>
           </p:cNvPr>
@@ -9321,8 +9474,8 @@
         </p:blipFill>
         <p:spPr>
           <a:xfrm>
-            <a:off x="1170610" y="2292828"/>
-            <a:ext cx="3890917" cy="3598611"/>
+            <a:off x="6391565" y="2606448"/>
+            <a:ext cx="5326850" cy="3284991"/>
           </a:xfrm>
           <a:prstGeom prst="rect">
             <a:avLst/>
@@ -9331,10 +9484,10 @@
       </p:pic>
       <p:pic>
         <p:nvPicPr>
-          <p:cNvPr id="9" name="Picture 8">
+          <p:cNvPr id="8" name="Picture 7">
             <a:extLst>
               <a:ext uri="{FF2B5EF4-FFF2-40B4-BE49-F238E27FC236}">
-                <a16:creationId xmlns:a16="http://schemas.microsoft.com/office/drawing/2014/main" id="{EAEF0C49-FF93-5F64-0E88-D4C661644504}"/>
+                <a16:creationId xmlns:a16="http://schemas.microsoft.com/office/drawing/2014/main" id="{D38ED42D-582B-4CAC-7247-A939B06530AE}"/>
               </a:ext>
             </a:extLst>
           </p:cNvPr>
@@ -9351,8 +9504,8 @@
         </p:blipFill>
         <p:spPr>
           <a:xfrm>
-            <a:off x="5753151" y="2312919"/>
-            <a:ext cx="5743523" cy="3594631"/>
+            <a:off x="473585" y="2606448"/>
+            <a:ext cx="5326850" cy="3284991"/>
           </a:xfrm>
           <a:prstGeom prst="rect">
             <a:avLst/>
@@ -9443,14 +9596,14 @@
           <p:nvPr>
             <p:extLst>
               <p:ext uri="{D42A27DB-BD31-4B8C-83A1-F6EECF244321}">
-                <p14:modId xmlns:p14="http://schemas.microsoft.com/office/powerpoint/2010/main" val="2879616987"/>
+                <p14:modId xmlns:p14="http://schemas.microsoft.com/office/powerpoint/2010/main" val="3173220565"/>
               </p:ext>
             </p:extLst>
           </p:nvPr>
         </p:nvGraphicFramePr>
         <p:xfrm>
-          <a:off x="2032000" y="2040466"/>
-          <a:ext cx="6096000" cy="741680"/>
+          <a:off x="2276763" y="2123594"/>
+          <a:ext cx="7638474" cy="2296160"/>
         </p:xfrm>
         <a:graphic>
           <a:graphicData uri="http://schemas.openxmlformats.org/drawingml/2006/table">
@@ -9459,21 +9612,21 @@
                 <a:tableStyleId>{5C22544A-7EE6-4342-B048-85BDC9FD1C3A}</a:tableStyleId>
               </a:tblPr>
               <a:tblGrid>
-                <a:gridCol w="2032000">
+                <a:gridCol w="2546158">
                   <a:extLst>
                     <a:ext uri="{9D8B030D-6E8A-4147-A177-3AD203B41FA5}">
                       <a16:colId xmlns:a16="http://schemas.microsoft.com/office/drawing/2014/main" val="2802435026"/>
                     </a:ext>
                   </a:extLst>
                 </a:gridCol>
-                <a:gridCol w="2032000">
+                <a:gridCol w="2546158">
                   <a:extLst>
                     <a:ext uri="{9D8B030D-6E8A-4147-A177-3AD203B41FA5}">
                       <a16:colId xmlns:a16="http://schemas.microsoft.com/office/drawing/2014/main" val="2797951521"/>
                     </a:ext>
                   </a:extLst>
                 </a:gridCol>
-                <a:gridCol w="2032000">
+                <a:gridCol w="2546158">
                   <a:extLst>
                     <a:ext uri="{9D8B030D-6E8A-4147-A177-3AD203B41FA5}">
                       <a16:colId xmlns:a16="http://schemas.microsoft.com/office/drawing/2014/main" val="3851634423"/>
@@ -9584,6 +9737,128 @@
                   </a:ext>
                 </a:extLst>
               </a:tr>
+              <a:tr h="370840">
+                <a:tc>
+                  <a:txBody>
+                    <a:bodyPr/>
+                    <a:lstStyle/>
+                    <a:p>
+                      <a:r>
+                        <a:rPr lang="en-US" dirty="0"/>
+                        <a:t>Number of reconstructed selected interactions</a:t>
+                      </a:r>
+                      <a:endParaRPr lang="en-SG" dirty="0"/>
+                    </a:p>
+                  </a:txBody>
+                  <a:tcPr/>
+                </a:tc>
+                <a:tc>
+                  <a:txBody>
+                    <a:bodyPr/>
+                    <a:lstStyle/>
+                    <a:p>
+                      <a:pPr algn="ctr"/>
+                      <a:r>
+                        <a:rPr lang="en-US" dirty="0"/>
+                        <a:t>3566</a:t>
+                      </a:r>
+                      <a:endParaRPr lang="en-SG" dirty="0"/>
+                    </a:p>
+                  </a:txBody>
+                  <a:tcPr/>
+                </a:tc>
+                <a:tc>
+                  <a:txBody>
+                    <a:bodyPr/>
+                    <a:lstStyle/>
+                    <a:p>
+                      <a:pPr algn="ctr"/>
+                      <a:r>
+                        <a:rPr lang="en-US" dirty="0"/>
+                        <a:t>4249</a:t>
+                      </a:r>
+                      <a:endParaRPr lang="en-SG" dirty="0"/>
+                    </a:p>
+                  </a:txBody>
+                  <a:tcPr/>
+                </a:tc>
+                <a:extLst>
+                  <a:ext uri="{0D108BD9-81ED-4DB2-BD59-A6C34878D82A}">
+                    <a16:rowId xmlns:a16="http://schemas.microsoft.com/office/drawing/2014/main" val="1678202118"/>
+                  </a:ext>
+                </a:extLst>
+              </a:tr>
+              <a:tr h="370840">
+                <a:tc>
+                  <a:txBody>
+                    <a:bodyPr/>
+                    <a:lstStyle/>
+                    <a:p>
+                      <a:pPr marL="0" marR="0" lvl="0" indent="0" algn="l" defTabSz="914400" rtl="0" eaLnBrk="1" fontAlgn="auto" latinLnBrk="0" hangingPunct="1">
+                        <a:lnSpc>
+                          <a:spcPct val="100000"/>
+                        </a:lnSpc>
+                        <a:spcBef>
+                          <a:spcPts val="0"/>
+                        </a:spcBef>
+                        <a:spcAft>
+                          <a:spcPts val="0"/>
+                        </a:spcAft>
+                        <a:buClrTx/>
+                        <a:buSzTx/>
+                        <a:buFontTx/>
+                        <a:buNone/>
+                        <a:tabLst/>
+                        <a:defRPr/>
+                      </a:pPr>
+                      <a:r>
+                        <a:rPr lang="en-US" dirty="0"/>
+                        <a:t>Number of true signal interactions</a:t>
+                      </a:r>
+                      <a:endParaRPr lang="en-SG" dirty="0"/>
+                    </a:p>
+                    <a:p>
+                      <a:endParaRPr lang="en-SG" dirty="0"/>
+                    </a:p>
+                  </a:txBody>
+                  <a:tcPr/>
+                </a:tc>
+                <a:tc>
+                  <a:txBody>
+                    <a:bodyPr/>
+                    <a:lstStyle/>
+                    <a:p>
+                      <a:pPr algn="ctr"/>
+                      <a:r>
+                        <a:rPr lang="en-US" dirty="0"/>
+                        <a:t>3815</a:t>
+                      </a:r>
+                      <a:endParaRPr lang="en-SG" dirty="0"/>
+                    </a:p>
+                  </a:txBody>
+                  <a:tcPr/>
+                </a:tc>
+                <a:tc>
+                  <a:txBody>
+                    <a:bodyPr/>
+                    <a:lstStyle/>
+                    <a:p>
+                      <a:pPr algn="ctr"/>
+                      <a:r>
+                        <a:rPr lang="en-US" dirty="0"/>
+                        <a:t>5532</a:t>
+                      </a:r>
+                      <a:endParaRPr lang="en-SG" dirty="0"/>
+                    </a:p>
+                  </a:txBody>
+                  <a:tcPr/>
+                </a:tc>
+                <a:extLst>
+                  <a:ext uri="{0D108BD9-81ED-4DB2-BD59-A6C34878D82A}">
+                    <a16:rowId xmlns:a16="http://schemas.microsoft.com/office/drawing/2014/main" val="707796089"/>
+                  </a:ext>
+                </a:extLst>
+              </a:tr>
             </a:tbl>
           </a:graphicData>
         </a:graphic>
@@ -9706,8 +9981,8 @@
         </p:nvSpPr>
         <p:spPr>
           <a:xfrm>
-            <a:off x="1097279" y="5891439"/>
-            <a:ext cx="4535458" cy="307777"/>
+            <a:off x="488156" y="5815233"/>
+            <a:ext cx="4998721" cy="369332"/>
           </a:xfrm>
           <a:prstGeom prst="rect">
             <a:avLst/>
@@ -9720,6 +9995,7 @@
           </a:bodyPr>
           <a:lstStyle/>
           <a:p>
+            <a:pPr algn="ctr"/>
             <a:r>
               <a:rPr lang="en-SG" sz="1400" b="1" dirty="0" err="1"/>
               <a:t>subleading</a:t>
@@ -9730,7 +10006,19 @@
             </a:r>
             <a:r>
               <a:rPr lang="en-US" sz="1400" b="1" dirty="0"/>
-              <a:t>from lane’s paper</a:t>
+              <a:t>from </a:t>
+            </a:r>
+            <a:r>
+              <a:rPr lang="en-US" b="1" dirty="0" err="1">
+                <a:solidFill>
+                  <a:srgbClr val="FF0000"/>
+                </a:solidFill>
+              </a:rPr>
+              <a:t>NuMI</a:t>
+            </a:r>
+            <a:r>
+              <a:rPr lang="en-US" sz="1400" b="1" dirty="0"/>
+              <a:t> selection</a:t>
             </a:r>
             <a:endParaRPr lang="en-SG" sz="1400" b="1" dirty="0"/>
           </a:p>
@@ -9750,8 +10038,8 @@
         </p:nvSpPr>
         <p:spPr>
           <a:xfrm>
-            <a:off x="6322166" y="5815233"/>
-            <a:ext cx="4833514" cy="307777"/>
+            <a:off x="6787727" y="5815233"/>
+            <a:ext cx="4833514" cy="369332"/>
           </a:xfrm>
           <a:prstGeom prst="rect">
             <a:avLst/>
@@ -9764,6 +10052,7 @@
           </a:bodyPr>
           <a:lstStyle/>
           <a:p>
+            <a:pPr algn="ctr"/>
             <a:r>
               <a:rPr lang="en-SG" sz="1400" b="1" dirty="0" err="1"/>
               <a:t>subleading</a:t>
@@ -9774,7 +10063,19 @@
             </a:r>
             <a:r>
               <a:rPr lang="en-US" sz="1400" b="1" dirty="0"/>
-              <a:t>from my BNB sample</a:t>
+              <a:t>from </a:t>
+            </a:r>
+            <a:r>
+              <a:rPr lang="en-US" b="1" dirty="0">
+                <a:solidFill>
+                  <a:srgbClr val="FF0000"/>
+                </a:solidFill>
+              </a:rPr>
+              <a:t>BNB</a:t>
+            </a:r>
+            <a:r>
+              <a:rPr lang="en-US" sz="1400" b="1" dirty="0"/>
+              <a:t> selection</a:t>
             </a:r>
             <a:endParaRPr lang="en-SG" sz="1400" b="1" dirty="0"/>
           </a:p>
@@ -9785,7 +10086,7 @@
           <p:cNvPr id="5" name="Picture 4">
             <a:extLst>
               <a:ext uri="{FF2B5EF4-FFF2-40B4-BE49-F238E27FC236}">
-                <a16:creationId xmlns:a16="http://schemas.microsoft.com/office/drawing/2014/main" id="{53F3515F-8E38-529C-FAEE-6A24CE3A2566}"/>
+                <a16:creationId xmlns:a16="http://schemas.microsoft.com/office/drawing/2014/main" id="{D5C1511D-D858-B195-5624-CE06C1BBC944}"/>
               </a:ext>
             </a:extLst>
           </p:cNvPr>
@@ -9802,8 +10103,8 @@
         </p:blipFill>
         <p:spPr>
           <a:xfrm>
-            <a:off x="1258905" y="2251346"/>
-            <a:ext cx="4079506" cy="3717776"/>
+            <a:off x="6441240" y="2410965"/>
+            <a:ext cx="5557607" cy="3404268"/>
           </a:xfrm>
           <a:prstGeom prst="rect">
             <a:avLst/>
@@ -9812,10 +10113,10 @@
       </p:pic>
       <p:pic>
         <p:nvPicPr>
-          <p:cNvPr id="11" name="Picture 10">
+          <p:cNvPr id="8" name="Picture 7">
             <a:extLst>
               <a:ext uri="{FF2B5EF4-FFF2-40B4-BE49-F238E27FC236}">
-                <a16:creationId xmlns:a16="http://schemas.microsoft.com/office/drawing/2014/main" id="{C807AAA6-304F-AF8B-9AF5-8D26B0D0785A}"/>
+                <a16:creationId xmlns:a16="http://schemas.microsoft.com/office/drawing/2014/main" id="{DDA11C10-86F6-B1C9-42E2-4168F8B2FF0D}"/>
               </a:ext>
             </a:extLst>
           </p:cNvPr>
@@ -9832,8 +10133,8 @@
         </p:blipFill>
         <p:spPr>
           <a:xfrm>
-            <a:off x="5632737" y="2279306"/>
-            <a:ext cx="5863937" cy="3612132"/>
+            <a:off x="193153" y="2413274"/>
+            <a:ext cx="5557607" cy="3404268"/>
           </a:xfrm>
           <a:prstGeom prst="rect">
             <a:avLst/>
@@ -9919,8 +10220,8 @@
         </p:nvSpPr>
         <p:spPr>
           <a:xfrm>
-            <a:off x="1097279" y="5891439"/>
-            <a:ext cx="4535458" cy="307777"/>
+            <a:off x="377287" y="5908218"/>
+            <a:ext cx="5224887" cy="369332"/>
           </a:xfrm>
           <a:prstGeom prst="rect">
             <a:avLst/>
@@ -9939,11 +10240,31 @@
             </a:r>
             <a:r>
               <a:rPr lang="en-SG" sz="1400" b="1" dirty="0"/>
-              <a:t> photon conversion distance </a:t>
+              <a:t> </a:t>
             </a:r>
             <a:r>
               <a:rPr lang="en-US" sz="1400" b="1" dirty="0"/>
-              <a:t>from lane’s paper</a:t>
+              <a:t>Transverse momentum imbalance</a:t>
+            </a:r>
+            <a:r>
+              <a:rPr lang="en-SG" sz="1400" b="1" dirty="0"/>
+              <a:t> </a:t>
+            </a:r>
+            <a:r>
+              <a:rPr lang="en-US" sz="1400" b="1" dirty="0"/>
+              <a:t>from </a:t>
+            </a:r>
+            <a:r>
+              <a:rPr lang="en-US" b="1" dirty="0" err="1">
+                <a:solidFill>
+                  <a:srgbClr val="FF0000"/>
+                </a:solidFill>
+              </a:rPr>
+              <a:t>NuMI</a:t>
+            </a:r>
+            <a:r>
+              <a:rPr lang="en-US" sz="1400" b="1" dirty="0"/>
+              <a:t> selection</a:t>
             </a:r>
             <a:endParaRPr lang="en-SG" sz="1400" b="1" dirty="0"/>
           </a:p>
@@ -9963,8 +10284,8 @@
         </p:nvSpPr>
         <p:spPr>
           <a:xfrm>
-            <a:off x="6322166" y="5815233"/>
-            <a:ext cx="5174508" cy="307777"/>
+            <a:off x="6589827" y="5891439"/>
+            <a:ext cx="5174508" cy="369332"/>
           </a:xfrm>
           <a:prstGeom prst="rect">
             <a:avLst/>
@@ -9977,6 +10298,7 @@
           </a:bodyPr>
           <a:lstStyle/>
           <a:p>
+            <a:pPr algn="ctr"/>
             <a:r>
               <a:rPr lang="en-SG" sz="1400" b="1" dirty="0" err="1"/>
               <a:t>subleading</a:t>
@@ -9995,18 +10317,65 @@
             </a:r>
             <a:r>
               <a:rPr lang="en-US" sz="1400" b="1" dirty="0"/>
-              <a:t>from my BNB sample</a:t>
+              <a:t>from </a:t>
+            </a:r>
+            <a:r>
+              <a:rPr lang="en-US" b="1" dirty="0">
+                <a:solidFill>
+                  <a:srgbClr val="FF0000"/>
+                </a:solidFill>
+              </a:rPr>
+              <a:t>BNB</a:t>
+            </a:r>
+            <a:r>
+              <a:rPr lang="en-US" sz="1400" b="1" dirty="0"/>
+              <a:t> selection</a:t>
             </a:r>
             <a:endParaRPr lang="en-SG" sz="1400" b="1" dirty="0"/>
+          </a:p>
+        </p:txBody>
+      </p:sp>
+      <p:sp>
+        <p:nvSpPr>
+          <p:cNvPr id="9" name="TextBox 8">
+            <a:extLst>
+              <a:ext uri="{FF2B5EF4-FFF2-40B4-BE49-F238E27FC236}">
+                <a16:creationId xmlns:a16="http://schemas.microsoft.com/office/drawing/2014/main" id="{9789EE1C-A6DB-5E04-2418-F4563CE3DE96}"/>
+              </a:ext>
+            </a:extLst>
+          </p:cNvPr>
+          <p:cNvSpPr txBox="1"/>
+          <p:nvPr/>
+        </p:nvSpPr>
+        <p:spPr>
+          <a:xfrm>
+            <a:off x="1097279" y="1815053"/>
+            <a:ext cx="10399395" cy="338554"/>
+          </a:xfrm>
+          <a:prstGeom prst="rect">
+            <a:avLst/>
+          </a:prstGeom>
+          <a:noFill/>
+        </p:spPr>
+        <p:txBody>
+          <a:bodyPr wrap="square">
+            <a:spAutoFit/>
+          </a:bodyPr>
+          <a:lstStyle/>
+          <a:p>
+            <a:r>
+              <a:rPr lang="en-US" sz="1600" b="1" dirty="0"/>
+              <a:t>Plotting Reconstructed Transverse momentum imbalance</a:t>
+            </a:r>
           </a:p>
         </p:txBody>
       </p:sp>
       <p:pic>
         <p:nvPicPr>
-          <p:cNvPr id="6" name="Picture 5">
+          <p:cNvPr id="7" name="Picture 6">
             <a:extLst>
               <a:ext uri="{FF2B5EF4-FFF2-40B4-BE49-F238E27FC236}">
-                <a16:creationId xmlns:a16="http://schemas.microsoft.com/office/drawing/2014/main" id="{B910A3DA-35A3-0643-177A-101E6E6D0734}"/>
+                <a16:creationId xmlns:a16="http://schemas.microsoft.com/office/drawing/2014/main" id="{12988604-F653-BD29-0789-32E84B9F286E}"/>
               </a:ext>
             </a:extLst>
           </p:cNvPr>
@@ -10023,8 +10392,8 @@
         </p:blipFill>
         <p:spPr>
           <a:xfrm>
-            <a:off x="6708958" y="3147548"/>
-            <a:ext cx="4400923" cy="2760670"/>
+            <a:off x="6708960" y="2794430"/>
+            <a:ext cx="4986616" cy="3113788"/>
           </a:xfrm>
           <a:prstGeom prst="rect">
             <a:avLst/>
@@ -10033,10 +10402,10 @@
       </p:pic>
       <p:pic>
         <p:nvPicPr>
-          <p:cNvPr id="8" name="Picture 7">
+          <p:cNvPr id="12" name="Picture 11">
             <a:extLst>
               <a:ext uri="{FF2B5EF4-FFF2-40B4-BE49-F238E27FC236}">
-                <a16:creationId xmlns:a16="http://schemas.microsoft.com/office/drawing/2014/main" id="{C8A067B9-E285-39B3-6939-B1213B9F9E47}"/>
+                <a16:creationId xmlns:a16="http://schemas.microsoft.com/office/drawing/2014/main" id="{9A856F91-0169-B696-E7D4-5447EBC82DD5}"/>
               </a:ext>
             </a:extLst>
           </p:cNvPr>
@@ -10053,70 +10422,14 @@
         </p:blipFill>
         <p:spPr>
           <a:xfrm>
-            <a:off x="1687140" y="3147548"/>
-            <a:ext cx="2860208" cy="2769726"/>
+            <a:off x="496425" y="2794430"/>
+            <a:ext cx="4986616" cy="3113789"/>
           </a:xfrm>
           <a:prstGeom prst="rect">
             <a:avLst/>
           </a:prstGeom>
         </p:spPr>
       </p:pic>
-      <p:sp>
-        <p:nvSpPr>
-          <p:cNvPr id="9" name="TextBox 8">
-            <a:extLst>
-              <a:ext uri="{FF2B5EF4-FFF2-40B4-BE49-F238E27FC236}">
-                <a16:creationId xmlns:a16="http://schemas.microsoft.com/office/drawing/2014/main" id="{9789EE1C-A6DB-5E04-2418-F4563CE3DE96}"/>
-              </a:ext>
-            </a:extLst>
-          </p:cNvPr>
-          <p:cNvSpPr txBox="1"/>
-          <p:nvPr/>
-        </p:nvSpPr>
-        <p:spPr>
-          <a:xfrm>
-            <a:off x="1097279" y="1815053"/>
-            <a:ext cx="10399395" cy="1323439"/>
-          </a:xfrm>
-          <a:prstGeom prst="rect">
-            <a:avLst/>
-          </a:prstGeom>
-          <a:noFill/>
-        </p:spPr>
-        <p:txBody>
-          <a:bodyPr wrap="square">
-            <a:spAutoFit/>
-          </a:bodyPr>
-          <a:lstStyle/>
-          <a:p>
-            <a:r>
-              <a:rPr lang="en-US" sz="1600" b="1" dirty="0"/>
-              <a:t>Plotting Reconstructed Transverse momentum imbalance</a:t>
-            </a:r>
-          </a:p>
-          <a:p>
-            <a:pPr marL="285750" indent="-285750">
-              <a:buFont typeface="Arial" panose="020B0604020202020204" pitchFamily="34" charset="0"/>
-              <a:buChar char="•"/>
-            </a:pPr>
-            <a:r>
-              <a:rPr lang="en-US" sz="1600" dirty="0"/>
-              <a:t>Transverse momentum imbalance, or the magnitude of the vector diﬀerence between the transverse momentum of the muon and the hadronic system</a:t>
-            </a:r>
-          </a:p>
-          <a:p>
-            <a:pPr marL="285750" indent="-285750">
-              <a:buFont typeface="Arial" panose="020B0604020202020204" pitchFamily="34" charset="0"/>
-              <a:buChar char="•"/>
-            </a:pPr>
-            <a:r>
-              <a:rPr lang="en-US" sz="1600" dirty="0"/>
-              <a:t>NOTE: seems like his plot in the paper is actually the reconstructed transverse momentum, and not the transverse momentum imbalance </a:t>
-            </a:r>
-            <a:endParaRPr lang="en-SG" sz="1600" dirty="0"/>
-          </a:p>
-        </p:txBody>
-      </p:sp>
     </p:spTree>
     <p:extLst>
       <p:ext uri="{BB962C8B-B14F-4D97-AF65-F5344CB8AC3E}">
@@ -10197,7 +10510,7 @@
         <p:spPr>
           <a:xfrm>
             <a:off x="1097279" y="1815053"/>
-            <a:ext cx="10399395" cy="1569660"/>
+            <a:ext cx="10399395" cy="338554"/>
           </a:xfrm>
           <a:prstGeom prst="rect">
             <a:avLst/>
@@ -10212,32 +10525,8 @@
           <a:p>
             <a:r>
               <a:rPr lang="en-US" sz="1600" b="1" dirty="0"/>
-              <a:t>Plotting Reconstructed Transverse momentum imbalance</a:t>
-            </a:r>
-          </a:p>
-          <a:p>
-            <a:pPr marL="285750" indent="-285750">
-              <a:buFont typeface="Arial" panose="020B0604020202020204" pitchFamily="34" charset="0"/>
-              <a:buChar char="•"/>
-            </a:pPr>
-            <a:r>
-              <a:rPr lang="en-US" sz="1600" dirty="0"/>
-              <a:t>Transverse momentum imbalance, or the magnitude of the vector diﬀerence between the transverse momentum of the muon and the hadronic system</a:t>
-            </a:r>
-          </a:p>
-          <a:p>
-            <a:pPr marL="285750" indent="-285750">
-              <a:buFont typeface="Arial" panose="020B0604020202020204" pitchFamily="34" charset="0"/>
-              <a:buChar char="•"/>
-            </a:pPr>
-            <a:r>
-              <a:rPr lang="en-US" sz="1600" dirty="0"/>
-              <a:t>NOTE: seems like his plot in the paper is actually the reconstructed transverse momentum, and not the transverse momentum imbalance </a:t>
-            </a:r>
-            <a:endParaRPr lang="en-SG" sz="1600" dirty="0"/>
-          </a:p>
-          <a:p>
-            <a:endParaRPr lang="en-SG" sz="1600" dirty="0"/>
+              <a:t>Plotting Reconstructed Transverse momentum</a:t>
+            </a:r>
           </a:p>
         </p:txBody>
       </p:sp>
@@ -10255,8 +10544,8 @@
         </p:nvSpPr>
         <p:spPr>
           <a:xfrm>
-            <a:off x="1097279" y="5891439"/>
-            <a:ext cx="4535458" cy="307777"/>
+            <a:off x="776179" y="5815233"/>
+            <a:ext cx="4535458" cy="369332"/>
           </a:xfrm>
           <a:prstGeom prst="rect">
             <a:avLst/>
@@ -10269,9 +10558,22 @@
           </a:bodyPr>
           <a:lstStyle/>
           <a:p>
+            <a:pPr algn="ctr"/>
             <a:r>
               <a:rPr lang="en-US" sz="1400" b="1" dirty="0"/>
-              <a:t>Transverse momentum imbalance from lane’s paper</a:t>
+              <a:t>Transverse momentum from </a:t>
+            </a:r>
+            <a:r>
+              <a:rPr lang="en-US" b="1" dirty="0" err="1">
+                <a:solidFill>
+                  <a:srgbClr val="FF0000"/>
+                </a:solidFill>
+              </a:rPr>
+              <a:t>NuMI</a:t>
+            </a:r>
+            <a:r>
+              <a:rPr lang="en-US" sz="1400" b="1" dirty="0"/>
+              <a:t> selection</a:t>
             </a:r>
             <a:endParaRPr lang="en-SG" sz="1400" b="1" dirty="0"/>
           </a:p>
@@ -10291,8 +10593,8 @@
         </p:nvSpPr>
         <p:spPr>
           <a:xfrm>
-            <a:off x="6322166" y="5815233"/>
-            <a:ext cx="5174508" cy="307777"/>
+            <a:off x="6559265" y="5815233"/>
+            <a:ext cx="5174508" cy="369332"/>
           </a:xfrm>
           <a:prstGeom prst="rect">
             <a:avLst/>
@@ -10305,17 +10607,22 @@
           </a:bodyPr>
           <a:lstStyle/>
           <a:p>
+            <a:pPr algn="ctr"/>
+            <a:r>
+              <a:rPr lang="en-US" sz="1400" b="1"/>
+              <a:t>Transverse momentum from </a:t>
+            </a:r>
+            <a:r>
+              <a:rPr lang="en-US" b="1" dirty="0">
+                <a:solidFill>
+                  <a:srgbClr val="FF0000"/>
+                </a:solidFill>
+              </a:rPr>
+              <a:t>BNB</a:t>
+            </a:r>
             <a:r>
               <a:rPr lang="en-US" sz="1400" b="1" dirty="0"/>
-              <a:t>Transverse momentum imbalance</a:t>
-            </a:r>
-            <a:r>
-              <a:rPr lang="en-SG" sz="1400" b="1" dirty="0"/>
-              <a:t> </a:t>
-            </a:r>
-            <a:r>
-              <a:rPr lang="en-US" sz="1400" b="1" dirty="0"/>
-              <a:t>from my BNB sample</a:t>
+              <a:t> selection</a:t>
             </a:r>
             <a:endParaRPr lang="en-SG" sz="1400" b="1" dirty="0"/>
           </a:p>
@@ -10323,10 +10630,10 @@
       </p:sp>
       <p:pic>
         <p:nvPicPr>
-          <p:cNvPr id="8" name="Picture 7">
+          <p:cNvPr id="10" name="Picture 9">
             <a:extLst>
               <a:ext uri="{FF2B5EF4-FFF2-40B4-BE49-F238E27FC236}">
-                <a16:creationId xmlns:a16="http://schemas.microsoft.com/office/drawing/2014/main" id="{BF053F36-7DFF-B77C-607F-75FC2925E8B1}"/>
+                <a16:creationId xmlns:a16="http://schemas.microsoft.com/office/drawing/2014/main" id="{E9AC443A-6A1B-78E0-F4E6-855B348C12DB}"/>
               </a:ext>
             </a:extLst>
           </p:cNvPr>
@@ -10343,8 +10650,8 @@
         </p:blipFill>
         <p:spPr>
           <a:xfrm>
-            <a:off x="1664851" y="3123585"/>
-            <a:ext cx="2858274" cy="2767854"/>
+            <a:off x="287910" y="2288845"/>
+            <a:ext cx="5511996" cy="3526388"/>
           </a:xfrm>
           <a:prstGeom prst="rect">
             <a:avLst/>
@@ -10353,10 +10660,10 @@
       </p:pic>
       <p:pic>
         <p:nvPicPr>
-          <p:cNvPr id="9" name="Picture 8">
+          <p:cNvPr id="12" name="Picture 11">
             <a:extLst>
               <a:ext uri="{FF2B5EF4-FFF2-40B4-BE49-F238E27FC236}">
-                <a16:creationId xmlns:a16="http://schemas.microsoft.com/office/drawing/2014/main" id="{30504486-42CB-5989-717E-5EDB0D54A803}"/>
+                <a16:creationId xmlns:a16="http://schemas.microsoft.com/office/drawing/2014/main" id="{B6C6A5B7-3F33-51B6-D129-E9AB060C9990}"/>
               </a:ext>
             </a:extLst>
           </p:cNvPr>
@@ -10373,8 +10680,8 @@
         </p:blipFill>
         <p:spPr>
           <a:xfrm>
-            <a:off x="6128504" y="2984576"/>
-            <a:ext cx="4398645" cy="2830657"/>
+            <a:off x="6392096" y="2288844"/>
+            <a:ext cx="5511997" cy="3526389"/>
           </a:xfrm>
           <a:prstGeom prst="rect">
             <a:avLst/>
@@ -10506,8 +10813,8 @@
         </p:nvSpPr>
         <p:spPr>
           <a:xfrm>
-            <a:off x="1097279" y="5891439"/>
-            <a:ext cx="4535458" cy="307777"/>
+            <a:off x="934602" y="5919305"/>
+            <a:ext cx="4535458" cy="369332"/>
           </a:xfrm>
           <a:prstGeom prst="rect">
             <a:avLst/>
@@ -10520,13 +10827,26 @@
           </a:bodyPr>
           <a:lstStyle/>
           <a:p>
+            <a:pPr algn="ctr"/>
             <a:r>
               <a:rPr lang="en-SG" sz="1400" b="1" dirty="0"/>
               <a:t>Boosting angle </a:t>
             </a:r>
             <a:r>
               <a:rPr lang="en-US" sz="1400" b="1" dirty="0"/>
-              <a:t>from lane’s paper</a:t>
+              <a:t>from </a:t>
+            </a:r>
+            <a:r>
+              <a:rPr lang="en-US" b="1" dirty="0" err="1">
+                <a:solidFill>
+                  <a:srgbClr val="FF0000"/>
+                </a:solidFill>
+              </a:rPr>
+              <a:t>NuMi</a:t>
+            </a:r>
+            <a:r>
+              <a:rPr lang="en-US" sz="1400" b="1" dirty="0"/>
+              <a:t> selection</a:t>
             </a:r>
             <a:endParaRPr lang="en-SG" sz="1400" b="1" dirty="0"/>
           </a:p>
@@ -10546,8 +10866,8 @@
         </p:nvSpPr>
         <p:spPr>
           <a:xfrm>
-            <a:off x="6559265" y="5919306"/>
-            <a:ext cx="5174508" cy="307777"/>
+            <a:off x="6402413" y="5918101"/>
+            <a:ext cx="5174508" cy="369332"/>
           </a:xfrm>
           <a:prstGeom prst="rect">
             <a:avLst/>
@@ -10560,13 +10880,26 @@
           </a:bodyPr>
           <a:lstStyle/>
           <a:p>
+            <a:pPr algn="ctr"/>
             <a:r>
               <a:rPr lang="en-SG" sz="1400" b="1" dirty="0"/>
               <a:t>Boosting angle </a:t>
             </a:r>
             <a:r>
               <a:rPr lang="en-US" sz="1400" b="1" dirty="0"/>
-              <a:t>from my BNB sample</a:t>
+              <a:t>from </a:t>
+            </a:r>
+            <a:r>
+              <a:rPr lang="en-US" b="1" dirty="0">
+                <a:solidFill>
+                  <a:srgbClr val="FF0000"/>
+                </a:solidFill>
+              </a:rPr>
+              <a:t>BNB</a:t>
+            </a:r>
+            <a:r>
+              <a:rPr lang="en-US" sz="1400" b="1" dirty="0"/>
+              <a:t> selection</a:t>
             </a:r>
             <a:endParaRPr lang="en-SG" sz="1400" b="1" dirty="0"/>
           </a:p>
@@ -10574,10 +10907,10 @@
       </p:sp>
       <p:pic>
         <p:nvPicPr>
-          <p:cNvPr id="6" name="Picture 5">
+          <p:cNvPr id="3" name="Picture 2">
             <a:extLst>
               <a:ext uri="{FF2B5EF4-FFF2-40B4-BE49-F238E27FC236}">
-                <a16:creationId xmlns:a16="http://schemas.microsoft.com/office/drawing/2014/main" id="{A614619B-68B7-C1FE-2A3C-3273F0E14AD3}"/>
+                <a16:creationId xmlns:a16="http://schemas.microsoft.com/office/drawing/2014/main" id="{524371C7-75A8-CE28-F8A2-0AD777D98252}"/>
               </a:ext>
             </a:extLst>
           </p:cNvPr>
@@ -10594,8 +10927,8 @@
         </p:blipFill>
         <p:spPr>
           <a:xfrm>
-            <a:off x="6126480" y="2791233"/>
-            <a:ext cx="4860809" cy="3128073"/>
+            <a:off x="6559262" y="2808321"/>
+            <a:ext cx="4860809" cy="3109780"/>
           </a:xfrm>
           <a:prstGeom prst="rect">
             <a:avLst/>
@@ -10604,10 +10937,10 @@
       </p:pic>
       <p:pic>
         <p:nvPicPr>
-          <p:cNvPr id="9" name="Picture 8">
+          <p:cNvPr id="8" name="Picture 7">
             <a:extLst>
               <a:ext uri="{FF2B5EF4-FFF2-40B4-BE49-F238E27FC236}">
-                <a16:creationId xmlns:a16="http://schemas.microsoft.com/office/drawing/2014/main" id="{6A41C518-62BB-5596-D569-3F2D953E12DB}"/>
+                <a16:creationId xmlns:a16="http://schemas.microsoft.com/office/drawing/2014/main" id="{70F1C82E-9977-1CF1-7E66-B1ACA623182D}"/>
               </a:ext>
             </a:extLst>
           </p:cNvPr>
@@ -10624,8 +10957,8 @@
         </p:blipFill>
         <p:spPr>
           <a:xfrm>
-            <a:off x="802254" y="2723743"/>
-            <a:ext cx="3269613" cy="3195563"/>
+            <a:off x="771927" y="2808321"/>
+            <a:ext cx="4860808" cy="3109780"/>
           </a:xfrm>
           <a:prstGeom prst="rect">
             <a:avLst/>
@@ -10757,8 +11090,8 @@
         </p:nvSpPr>
         <p:spPr>
           <a:xfrm>
-            <a:off x="1097279" y="5891439"/>
-            <a:ext cx="4535458" cy="307777"/>
+            <a:off x="1188401" y="5891439"/>
+            <a:ext cx="4535458" cy="369332"/>
           </a:xfrm>
           <a:prstGeom prst="rect">
             <a:avLst/>
@@ -10771,9 +11104,22 @@
           </a:bodyPr>
           <a:lstStyle/>
           <a:p>
+            <a:pPr algn="ctr"/>
             <a:r>
               <a:rPr lang="en-US" sz="1400" b="1" dirty="0"/>
-              <a:t>Four-Momentum Transfer from lane’s paper</a:t>
+              <a:t>Four-Momentum Transfer from </a:t>
+            </a:r>
+            <a:r>
+              <a:rPr lang="en-US" b="1" dirty="0" err="1">
+                <a:solidFill>
+                  <a:srgbClr val="FF0000"/>
+                </a:solidFill>
+              </a:rPr>
+              <a:t>NuMI</a:t>
+            </a:r>
+            <a:r>
+              <a:rPr lang="en-US" sz="1400" b="1" dirty="0"/>
+              <a:t> selection</a:t>
             </a:r>
             <a:endParaRPr lang="en-SG" sz="1400" b="1" dirty="0"/>
           </a:p>
@@ -10793,8 +11139,8 @@
         </p:nvSpPr>
         <p:spPr>
           <a:xfrm>
-            <a:off x="6559265" y="5919306"/>
-            <a:ext cx="5174508" cy="307777"/>
+            <a:off x="6217519" y="5891439"/>
+            <a:ext cx="5174508" cy="369332"/>
           </a:xfrm>
           <a:prstGeom prst="rect">
             <a:avLst/>
@@ -10807,9 +11153,22 @@
           </a:bodyPr>
           <a:lstStyle/>
           <a:p>
+            <a:pPr algn="ctr"/>
             <a:r>
               <a:rPr lang="en-US" sz="1400" b="1" dirty="0"/>
-              <a:t>Four-Momentum Transfer from my BNB sample</a:t>
+              <a:t>Four-Momentum Transfer from </a:t>
+            </a:r>
+            <a:r>
+              <a:rPr lang="en-US" b="1" dirty="0">
+                <a:solidFill>
+                  <a:srgbClr val="FF0000"/>
+                </a:solidFill>
+              </a:rPr>
+              <a:t>BNB</a:t>
+            </a:r>
+            <a:r>
+              <a:rPr lang="en-US" sz="1400" b="1" dirty="0"/>
+              <a:t> selection</a:t>
             </a:r>
             <a:endParaRPr lang="en-SG" sz="1400" b="1" dirty="0"/>
           </a:p>
@@ -10817,10 +11176,10 @@
       </p:sp>
       <p:pic>
         <p:nvPicPr>
-          <p:cNvPr id="5" name="Picture 4">
+          <p:cNvPr id="20" name="Picture 19">
             <a:extLst>
               <a:ext uri="{FF2B5EF4-FFF2-40B4-BE49-F238E27FC236}">
-                <a16:creationId xmlns:a16="http://schemas.microsoft.com/office/drawing/2014/main" id="{823976C6-C9BC-9E96-7317-9AA833E267E8}"/>
+                <a16:creationId xmlns:a16="http://schemas.microsoft.com/office/drawing/2014/main" id="{EF2A2686-89A1-E522-D85D-E5262133ABBB}"/>
               </a:ext>
             </a:extLst>
           </p:cNvPr>
@@ -10837,8 +11196,8 @@
         </p:blipFill>
         <p:spPr>
           <a:xfrm>
-            <a:off x="5632736" y="2622985"/>
-            <a:ext cx="5122253" cy="3296321"/>
+            <a:off x="988542" y="2690091"/>
+            <a:ext cx="4906483" cy="3139001"/>
           </a:xfrm>
           <a:prstGeom prst="rect">
             <a:avLst/>
@@ -10847,10 +11206,10 @@
       </p:pic>
       <p:pic>
         <p:nvPicPr>
-          <p:cNvPr id="8" name="Picture 7">
+          <p:cNvPr id="22" name="Picture 21">
             <a:extLst>
               <a:ext uri="{FF2B5EF4-FFF2-40B4-BE49-F238E27FC236}">
-                <a16:creationId xmlns:a16="http://schemas.microsoft.com/office/drawing/2014/main" id="{BAEA7560-CD1A-B767-57EE-A45B1F1197D5}"/>
+                <a16:creationId xmlns:a16="http://schemas.microsoft.com/office/drawing/2014/main" id="{8B46C2C0-4001-8488-94C5-C7D79A7F1ACF}"/>
               </a:ext>
             </a:extLst>
           </p:cNvPr>
@@ -10867,8 +11226,8 @@
         </p:blipFill>
         <p:spPr>
           <a:xfrm>
-            <a:off x="1045899" y="2595117"/>
-            <a:ext cx="3363593" cy="3296321"/>
+            <a:off x="6296976" y="2690090"/>
+            <a:ext cx="4906483" cy="3139001"/>
           </a:xfrm>
           <a:prstGeom prst="rect">
             <a:avLst/>
@@ -11000,8 +11359,8 @@
         </p:nvSpPr>
         <p:spPr>
           <a:xfrm>
-            <a:off x="1097279" y="5891439"/>
-            <a:ext cx="4535458" cy="307777"/>
+            <a:off x="1193404" y="5895880"/>
+            <a:ext cx="4535458" cy="369332"/>
           </a:xfrm>
           <a:prstGeom prst="rect">
             <a:avLst/>
@@ -11014,9 +11373,22 @@
           </a:bodyPr>
           <a:lstStyle/>
           <a:p>
+            <a:pPr algn="ctr"/>
             <a:r>
               <a:rPr lang="en-US" sz="1400" b="1" dirty="0"/>
-              <a:t>Hadronic Invariant Mass from lane’s paper</a:t>
+              <a:t>Hadronic Invariant Mass from </a:t>
+            </a:r>
+            <a:r>
+              <a:rPr lang="en-US" b="1" dirty="0" err="1">
+                <a:solidFill>
+                  <a:srgbClr val="FF0000"/>
+                </a:solidFill>
+              </a:rPr>
+              <a:t>NuMI</a:t>
+            </a:r>
+            <a:r>
+              <a:rPr lang="en-US" sz="1400" b="1" dirty="0"/>
+              <a:t> selection</a:t>
             </a:r>
             <a:endParaRPr lang="en-SG" sz="1400" b="1" dirty="0"/>
           </a:p>
@@ -11036,8 +11408,8 @@
         </p:nvSpPr>
         <p:spPr>
           <a:xfrm>
-            <a:off x="6559265" y="5919306"/>
-            <a:ext cx="5174508" cy="307777"/>
+            <a:off x="6169755" y="5895881"/>
+            <a:ext cx="5174508" cy="369332"/>
           </a:xfrm>
           <a:prstGeom prst="rect">
             <a:avLst/>
@@ -11050,9 +11422,22 @@
           </a:bodyPr>
           <a:lstStyle/>
           <a:p>
+            <a:pPr algn="ctr"/>
             <a:r>
               <a:rPr lang="en-US" sz="1400" b="1" dirty="0"/>
-              <a:t>Hadronic Invariant Mass from my BNB sample</a:t>
+              <a:t>Hadronic Invariant Mass from </a:t>
+            </a:r>
+            <a:r>
+              <a:rPr lang="en-US" b="1" dirty="0">
+                <a:solidFill>
+                  <a:srgbClr val="FF0000"/>
+                </a:solidFill>
+              </a:rPr>
+              <a:t>BNB</a:t>
+            </a:r>
+            <a:r>
+              <a:rPr lang="en-US" sz="1400" b="1" dirty="0"/>
+              <a:t> selection</a:t>
             </a:r>
             <a:endParaRPr lang="en-SG" sz="1400" b="1" dirty="0"/>
           </a:p>
@@ -11060,10 +11445,10 @@
       </p:sp>
       <p:pic>
         <p:nvPicPr>
-          <p:cNvPr id="6" name="Picture 5">
+          <p:cNvPr id="3" name="Picture 2">
             <a:extLst>
               <a:ext uri="{FF2B5EF4-FFF2-40B4-BE49-F238E27FC236}">
-                <a16:creationId xmlns:a16="http://schemas.microsoft.com/office/drawing/2014/main" id="{605BAAF9-FDBB-8310-C16A-9C547E768A21}"/>
+                <a16:creationId xmlns:a16="http://schemas.microsoft.com/office/drawing/2014/main" id="{45D91724-505E-8BE6-1C31-97951CFADEF9}"/>
               </a:ext>
             </a:extLst>
           </p:cNvPr>
@@ -11080,8 +11465,8 @@
         </p:blipFill>
         <p:spPr>
           <a:xfrm>
-            <a:off x="603365" y="2774904"/>
-            <a:ext cx="4566107" cy="3144402"/>
+            <a:off x="6446556" y="2774903"/>
+            <a:ext cx="5118106" cy="3177757"/>
           </a:xfrm>
           <a:prstGeom prst="rect">
             <a:avLst/>
@@ -11090,10 +11475,10 @@
       </p:pic>
       <p:pic>
         <p:nvPicPr>
-          <p:cNvPr id="11" name="Picture 10">
+          <p:cNvPr id="9" name="Picture 8">
             <a:extLst>
               <a:ext uri="{FF2B5EF4-FFF2-40B4-BE49-F238E27FC236}">
-                <a16:creationId xmlns:a16="http://schemas.microsoft.com/office/drawing/2014/main" id="{EA2A85A6-0380-70B9-2FB7-9AF8158FD1EE}"/>
+                <a16:creationId xmlns:a16="http://schemas.microsoft.com/office/drawing/2014/main" id="{6B2CEE27-6635-8298-23E4-1C44CE6BAA99}"/>
               </a:ext>
             </a:extLst>
           </p:cNvPr>
@@ -11110,8 +11495,8 @@
         </p:blipFill>
         <p:spPr>
           <a:xfrm>
-            <a:off x="5834351" y="2774904"/>
-            <a:ext cx="5141343" cy="3177757"/>
+            <a:off x="627339" y="2774903"/>
+            <a:ext cx="5118106" cy="3177757"/>
           </a:xfrm>
           <a:prstGeom prst="rect">
             <a:avLst/>
@@ -11232,8 +11617,8 @@
         </p:nvSpPr>
         <p:spPr>
           <a:xfrm>
-            <a:off x="1097279" y="5891439"/>
-            <a:ext cx="4535458" cy="307777"/>
+            <a:off x="1069112" y="5822442"/>
+            <a:ext cx="4535458" cy="369332"/>
           </a:xfrm>
           <a:prstGeom prst="rect">
             <a:avLst/>
@@ -11246,9 +11631,22 @@
           </a:bodyPr>
           <a:lstStyle/>
           <a:p>
+            <a:pPr algn="ctr"/>
             <a:r>
               <a:rPr lang="en-US" sz="1400" b="1" dirty="0"/>
-              <a:t>leading photon KE from lane’s paper</a:t>
+              <a:t>leading photon KE from </a:t>
+            </a:r>
+            <a:r>
+              <a:rPr lang="en-US" b="1" dirty="0" err="1">
+                <a:solidFill>
+                  <a:srgbClr val="FF0000"/>
+                </a:solidFill>
+              </a:rPr>
+              <a:t>NuMI</a:t>
+            </a:r>
+            <a:r>
+              <a:rPr lang="en-US" sz="1400" b="1" dirty="0"/>
+              <a:t> selection</a:t>
             </a:r>
             <a:endParaRPr lang="en-SG" sz="1400" b="1" dirty="0"/>
           </a:p>
@@ -11268,8 +11666,8 @@
         </p:nvSpPr>
         <p:spPr>
           <a:xfrm>
-            <a:off x="6559265" y="5919306"/>
-            <a:ext cx="5174508" cy="307777"/>
+            <a:off x="6559265" y="5822442"/>
+            <a:ext cx="5174508" cy="369332"/>
           </a:xfrm>
           <a:prstGeom prst="rect">
             <a:avLst/>
@@ -11282,9 +11680,22 @@
           </a:bodyPr>
           <a:lstStyle/>
           <a:p>
+            <a:pPr algn="ctr"/>
             <a:r>
               <a:rPr lang="en-US" sz="1400" b="1" dirty="0"/>
-              <a:t>leading photon KE from my BNB sample</a:t>
+              <a:t>leading photon KE from </a:t>
+            </a:r>
+            <a:r>
+              <a:rPr lang="en-US" b="1" dirty="0">
+                <a:solidFill>
+                  <a:srgbClr val="FF0000"/>
+                </a:solidFill>
+              </a:rPr>
+              <a:t>BNB</a:t>
+            </a:r>
+            <a:r>
+              <a:rPr lang="en-US" sz="1400" b="1" dirty="0"/>
+              <a:t> selection</a:t>
             </a:r>
             <a:endParaRPr lang="en-SG" sz="1400" b="1" dirty="0"/>
           </a:p>
@@ -11292,10 +11703,10 @@
       </p:sp>
       <p:pic>
         <p:nvPicPr>
-          <p:cNvPr id="17" name="Picture 16">
+          <p:cNvPr id="9" name="Picture 8">
             <a:extLst>
               <a:ext uri="{FF2B5EF4-FFF2-40B4-BE49-F238E27FC236}">
-                <a16:creationId xmlns:a16="http://schemas.microsoft.com/office/drawing/2014/main" id="{29657B87-25BE-C822-B506-6E64D2F0D1E4}"/>
+                <a16:creationId xmlns:a16="http://schemas.microsoft.com/office/drawing/2014/main" id="{168C3A1E-1106-263C-EB90-C135DB2819CA}"/>
               </a:ext>
             </a:extLst>
           </p:cNvPr>
@@ -11312,8 +11723,8 @@
         </p:blipFill>
         <p:spPr>
           <a:xfrm>
-            <a:off x="667486" y="2391806"/>
-            <a:ext cx="3619010" cy="3499633"/>
+            <a:off x="6296975" y="2420707"/>
+            <a:ext cx="5116368" cy="3273279"/>
           </a:xfrm>
           <a:prstGeom prst="rect">
             <a:avLst/>
@@ -11322,10 +11733,10 @@
       </p:pic>
       <p:pic>
         <p:nvPicPr>
-          <p:cNvPr id="23" name="Picture 22">
+          <p:cNvPr id="11" name="Picture 10">
             <a:extLst>
               <a:ext uri="{FF2B5EF4-FFF2-40B4-BE49-F238E27FC236}">
-                <a16:creationId xmlns:a16="http://schemas.microsoft.com/office/drawing/2014/main" id="{6036284D-8F17-DFFD-A450-E9BEC0450934}"/>
+                <a16:creationId xmlns:a16="http://schemas.microsoft.com/office/drawing/2014/main" id="{272AEDD4-B2EA-437D-C7C3-538567DFE2AA}"/>
               </a:ext>
             </a:extLst>
           </p:cNvPr>
@@ -11342,8 +11753,8 @@
         </p:blipFill>
         <p:spPr>
           <a:xfrm>
-            <a:off x="5356511" y="2391805"/>
-            <a:ext cx="5495767" cy="3499633"/>
+            <a:off x="778658" y="2420707"/>
+            <a:ext cx="5116368" cy="3273279"/>
           </a:xfrm>
           <a:prstGeom prst="rect">
             <a:avLst/>
@@ -11472,8 +11883,8 @@
         </p:nvSpPr>
         <p:spPr>
           <a:xfrm>
-            <a:off x="1097279" y="5891439"/>
-            <a:ext cx="4535458" cy="307777"/>
+            <a:off x="759174" y="5920814"/>
+            <a:ext cx="4535458" cy="369332"/>
           </a:xfrm>
           <a:prstGeom prst="rect">
             <a:avLst/>
@@ -11486,13 +11897,26 @@
           </a:bodyPr>
           <a:lstStyle/>
           <a:p>
+            <a:pPr algn="ctr"/>
             <a:r>
               <a:rPr lang="en-US" sz="1400" b="1" dirty="0" err="1"/>
               <a:t>subleading</a:t>
             </a:r>
             <a:r>
               <a:rPr lang="en-US" sz="1400" b="1" dirty="0"/>
-              <a:t> photon KE from lane’s paper</a:t>
+              <a:t> photon KE from </a:t>
+            </a:r>
+            <a:r>
+              <a:rPr lang="en-US" b="1" dirty="0" err="1">
+                <a:solidFill>
+                  <a:srgbClr val="FF0000"/>
+                </a:solidFill>
+              </a:rPr>
+              <a:t>NuMI</a:t>
+            </a:r>
+            <a:r>
+              <a:rPr lang="en-US" sz="1400" b="1" dirty="0"/>
+              <a:t> selection</a:t>
             </a:r>
             <a:endParaRPr lang="en-SG" sz="1400" b="1" dirty="0"/>
           </a:p>
@@ -11512,8 +11936,8 @@
         </p:nvSpPr>
         <p:spPr>
           <a:xfrm>
-            <a:off x="6559265" y="5919306"/>
-            <a:ext cx="5174508" cy="307777"/>
+            <a:off x="6559265" y="5920815"/>
+            <a:ext cx="5174508" cy="369332"/>
           </a:xfrm>
           <a:prstGeom prst="rect">
             <a:avLst/>
@@ -11526,13 +11950,26 @@
           </a:bodyPr>
           <a:lstStyle/>
           <a:p>
+            <a:pPr algn="ctr"/>
             <a:r>
               <a:rPr lang="en-US" sz="1400" b="1" dirty="0" err="1"/>
               <a:t>subleading</a:t>
             </a:r>
             <a:r>
               <a:rPr lang="en-US" sz="1400" b="1" dirty="0"/>
-              <a:t> photon KE from my BNB sample</a:t>
+              <a:t> photon KE from </a:t>
+            </a:r>
+            <a:r>
+              <a:rPr lang="en-US" b="1" dirty="0">
+                <a:solidFill>
+                  <a:srgbClr val="FF0000"/>
+                </a:solidFill>
+              </a:rPr>
+              <a:t>BNB</a:t>
+            </a:r>
+            <a:r>
+              <a:rPr lang="en-US" sz="1400" b="1" dirty="0"/>
+              <a:t> selection</a:t>
             </a:r>
             <a:endParaRPr lang="en-SG" sz="1400" b="1" dirty="0"/>
           </a:p>
@@ -11540,10 +11977,10 @@
       </p:sp>
       <p:pic>
         <p:nvPicPr>
-          <p:cNvPr id="5" name="Picture 4">
+          <p:cNvPr id="10" name="Picture 9">
             <a:extLst>
               <a:ext uri="{FF2B5EF4-FFF2-40B4-BE49-F238E27FC236}">
-                <a16:creationId xmlns:a16="http://schemas.microsoft.com/office/drawing/2014/main" id="{079C18FE-B2A3-E32B-8E84-21E80F16B2E6}"/>
+                <a16:creationId xmlns:a16="http://schemas.microsoft.com/office/drawing/2014/main" id="{E0E71B6E-0645-A381-B1AA-6DA5AB7B94CA}"/>
               </a:ext>
             </a:extLst>
           </p:cNvPr>
@@ -11560,8 +11997,8 @@
         </p:blipFill>
         <p:spPr>
           <a:xfrm>
-            <a:off x="963421" y="2535031"/>
-            <a:ext cx="3421720" cy="3403455"/>
+            <a:off x="325633" y="2490760"/>
+            <a:ext cx="5377670" cy="3400677"/>
           </a:xfrm>
           <a:prstGeom prst="rect">
             <a:avLst/>
@@ -11570,10 +12007,10 @@
       </p:pic>
       <p:pic>
         <p:nvPicPr>
-          <p:cNvPr id="9" name="Picture 8">
+          <p:cNvPr id="12" name="Picture 11">
             <a:extLst>
               <a:ext uri="{FF2B5EF4-FFF2-40B4-BE49-F238E27FC236}">
-                <a16:creationId xmlns:a16="http://schemas.microsoft.com/office/drawing/2014/main" id="{07D5CAB4-58AE-A513-8C65-9105D6AD4F88}"/>
+                <a16:creationId xmlns:a16="http://schemas.microsoft.com/office/drawing/2014/main" id="{37154971-12AA-150D-B3B0-24695583168F}"/>
               </a:ext>
             </a:extLst>
           </p:cNvPr>
@@ -11590,8 +12027,8 @@
         </p:blipFill>
         <p:spPr>
           <a:xfrm>
-            <a:off x="5462444" y="2490762"/>
-            <a:ext cx="5408756" cy="3400677"/>
+            <a:off x="6488699" y="2490759"/>
+            <a:ext cx="5377670" cy="3400677"/>
           </a:xfrm>
           <a:prstGeom prst="rect">
             <a:avLst/>
@@ -11715,8 +12152,8 @@
         </p:nvSpPr>
         <p:spPr>
           <a:xfrm>
-            <a:off x="1097279" y="5891439"/>
-            <a:ext cx="4535458" cy="307777"/>
+            <a:off x="860530" y="5891439"/>
+            <a:ext cx="4535458" cy="369332"/>
           </a:xfrm>
           <a:prstGeom prst="rect">
             <a:avLst/>
@@ -11729,13 +12166,26 @@
           </a:bodyPr>
           <a:lstStyle/>
           <a:p>
+            <a:pPr algn="ctr"/>
             <a:r>
               <a:rPr lang="en-SG" sz="1400" b="1" dirty="0"/>
               <a:t>pi0 di-photon opening angle</a:t>
             </a:r>
             <a:r>
               <a:rPr lang="en-US" sz="1400" b="1" dirty="0"/>
-              <a:t> from lane’s paper</a:t>
+              <a:t> from </a:t>
+            </a:r>
+            <a:r>
+              <a:rPr lang="en-US" b="1" dirty="0" err="1">
+                <a:solidFill>
+                  <a:srgbClr val="FF0000"/>
+                </a:solidFill>
+              </a:rPr>
+              <a:t>NuMI</a:t>
+            </a:r>
+            <a:r>
+              <a:rPr lang="en-US" sz="1400" b="1" dirty="0"/>
+              <a:t> selection</a:t>
             </a:r>
             <a:endParaRPr lang="en-SG" sz="1400" b="1" dirty="0"/>
           </a:p>
@@ -11755,8 +12205,8 @@
         </p:nvSpPr>
         <p:spPr>
           <a:xfrm>
-            <a:off x="6559265" y="5919306"/>
-            <a:ext cx="5174508" cy="307777"/>
+            <a:off x="6476487" y="5891439"/>
+            <a:ext cx="5174508" cy="369332"/>
           </a:xfrm>
           <a:prstGeom prst="rect">
             <a:avLst/>
@@ -11769,13 +12219,26 @@
           </a:bodyPr>
           <a:lstStyle/>
           <a:p>
+            <a:pPr algn="ctr"/>
             <a:r>
               <a:rPr lang="en-SG" sz="1400" b="1" dirty="0"/>
               <a:t>pi0 di-photon opening angle </a:t>
             </a:r>
             <a:r>
               <a:rPr lang="en-US" sz="1400" b="1" dirty="0"/>
-              <a:t>from my BNB sample</a:t>
+              <a:t>from </a:t>
+            </a:r>
+            <a:r>
+              <a:rPr lang="en-US" b="1" dirty="0">
+                <a:solidFill>
+                  <a:srgbClr val="FF0000"/>
+                </a:solidFill>
+              </a:rPr>
+              <a:t>BNB</a:t>
+            </a:r>
+            <a:r>
+              <a:rPr lang="en-US" sz="1400" b="1" dirty="0"/>
+              <a:t> selection</a:t>
             </a:r>
             <a:endParaRPr lang="en-SG" sz="1400" b="1" dirty="0"/>
           </a:p>
@@ -11783,10 +12246,10 @@
       </p:sp>
       <p:pic>
         <p:nvPicPr>
-          <p:cNvPr id="6" name="Picture 5">
+          <p:cNvPr id="3" name="Picture 2">
             <a:extLst>
               <a:ext uri="{FF2B5EF4-FFF2-40B4-BE49-F238E27FC236}">
-                <a16:creationId xmlns:a16="http://schemas.microsoft.com/office/drawing/2014/main" id="{A2263FC1-F432-C367-4E63-59804BCF378E}"/>
+                <a16:creationId xmlns:a16="http://schemas.microsoft.com/office/drawing/2014/main" id="{BEC10E32-635D-E222-47C8-662DCC6367A2}"/>
               </a:ext>
             </a:extLst>
           </p:cNvPr>
@@ -11803,8 +12266,8 @@
         </p:blipFill>
         <p:spPr>
           <a:xfrm>
-            <a:off x="5632737" y="2583382"/>
-            <a:ext cx="5340063" cy="3308058"/>
+            <a:off x="6393710" y="2631378"/>
+            <a:ext cx="5340063" cy="3260061"/>
           </a:xfrm>
           <a:prstGeom prst="rect">
             <a:avLst/>
@@ -11813,10 +12276,10 @@
       </p:pic>
       <p:pic>
         <p:nvPicPr>
-          <p:cNvPr id="9" name="Picture 8">
+          <p:cNvPr id="8" name="Picture 7">
             <a:extLst>
               <a:ext uri="{FF2B5EF4-FFF2-40B4-BE49-F238E27FC236}">
-                <a16:creationId xmlns:a16="http://schemas.microsoft.com/office/drawing/2014/main" id="{7035186E-5351-82BE-D394-92572B82BDEF}"/>
+                <a16:creationId xmlns:a16="http://schemas.microsoft.com/office/drawing/2014/main" id="{0379EB7C-DAD5-3898-6188-EB95F94F27DF}"/>
               </a:ext>
             </a:extLst>
           </p:cNvPr>
@@ -11833,8 +12296,8 @@
         </p:blipFill>
         <p:spPr>
           <a:xfrm>
-            <a:off x="888855" y="2493818"/>
-            <a:ext cx="3569973" cy="3425488"/>
+            <a:off x="458227" y="2631377"/>
+            <a:ext cx="5340063" cy="3260061"/>
           </a:xfrm>
           <a:prstGeom prst="rect">
             <a:avLst/>
@@ -11958,8 +12421,8 @@
         </p:nvSpPr>
         <p:spPr>
           <a:xfrm>
-            <a:off x="1097279" y="5891439"/>
-            <a:ext cx="4535458" cy="307777"/>
+            <a:off x="773753" y="5884511"/>
+            <a:ext cx="4535458" cy="369332"/>
           </a:xfrm>
           <a:prstGeom prst="rect">
             <a:avLst/>
@@ -11972,13 +12435,26 @@
           </a:bodyPr>
           <a:lstStyle/>
           <a:p>
+            <a:pPr algn="ctr"/>
             <a:r>
               <a:rPr lang="en-SG" sz="1400" b="1" dirty="0"/>
               <a:t>Muon momentum </a:t>
             </a:r>
             <a:r>
               <a:rPr lang="en-US" sz="1400" b="1" dirty="0"/>
-              <a:t>from lane’s paper</a:t>
+              <a:t>from </a:t>
+            </a:r>
+            <a:r>
+              <a:rPr lang="en-US" b="1" dirty="0" err="1">
+                <a:solidFill>
+                  <a:srgbClr val="FF0000"/>
+                </a:solidFill>
+              </a:rPr>
+              <a:t>NuMI</a:t>
+            </a:r>
+            <a:r>
+              <a:rPr lang="en-US" sz="1400" b="1" dirty="0"/>
+              <a:t> selection</a:t>
             </a:r>
             <a:endParaRPr lang="en-SG" sz="1400" b="1" dirty="0"/>
           </a:p>
@@ -11998,8 +12474,8 @@
         </p:nvSpPr>
         <p:spPr>
           <a:xfrm>
-            <a:off x="6559265" y="5919306"/>
-            <a:ext cx="5174508" cy="307777"/>
+            <a:off x="6882791" y="5884511"/>
+            <a:ext cx="5174508" cy="369332"/>
           </a:xfrm>
           <a:prstGeom prst="rect">
             <a:avLst/>
@@ -12012,13 +12488,26 @@
           </a:bodyPr>
           <a:lstStyle/>
           <a:p>
+            <a:pPr algn="ctr"/>
             <a:r>
               <a:rPr lang="en-SG" sz="1400" b="1" dirty="0"/>
               <a:t>Muon momentum </a:t>
             </a:r>
             <a:r>
               <a:rPr lang="en-US" sz="1400" b="1" dirty="0"/>
-              <a:t>from my BNB sample</a:t>
+              <a:t>from </a:t>
+            </a:r>
+            <a:r>
+              <a:rPr lang="en-US" b="1" dirty="0">
+                <a:solidFill>
+                  <a:srgbClr val="FF0000"/>
+                </a:solidFill>
+              </a:rPr>
+              <a:t>BNB</a:t>
+            </a:r>
+            <a:r>
+              <a:rPr lang="en-US" sz="1400" b="1" dirty="0"/>
+              <a:t> selection</a:t>
             </a:r>
             <a:endParaRPr lang="en-SG" sz="1400" b="1" dirty="0"/>
           </a:p>
@@ -12026,10 +12515,10 @@
       </p:sp>
       <p:pic>
         <p:nvPicPr>
-          <p:cNvPr id="5" name="Picture 4">
+          <p:cNvPr id="9" name="Picture 8">
             <a:extLst>
               <a:ext uri="{FF2B5EF4-FFF2-40B4-BE49-F238E27FC236}">
-                <a16:creationId xmlns:a16="http://schemas.microsoft.com/office/drawing/2014/main" id="{5D405FAA-E545-F808-1FD5-D0058F4E3A6C}"/>
+                <a16:creationId xmlns:a16="http://schemas.microsoft.com/office/drawing/2014/main" id="{41A54DB7-348D-99D7-BAEB-5FA91F666A76}"/>
               </a:ext>
             </a:extLst>
           </p:cNvPr>
@@ -12046,8 +12535,8 @@
         </p:blipFill>
         <p:spPr>
           <a:xfrm>
-            <a:off x="1097279" y="2500152"/>
-            <a:ext cx="3556345" cy="3474518"/>
+            <a:off x="6559268" y="2549412"/>
+            <a:ext cx="5212994" cy="3335097"/>
           </a:xfrm>
           <a:prstGeom prst="rect">
             <a:avLst/>
@@ -12056,10 +12545,10 @@
       </p:pic>
       <p:pic>
         <p:nvPicPr>
-          <p:cNvPr id="19" name="Picture 18">
+          <p:cNvPr id="11" name="Picture 10">
             <a:extLst>
               <a:ext uri="{FF2B5EF4-FFF2-40B4-BE49-F238E27FC236}">
-                <a16:creationId xmlns:a16="http://schemas.microsoft.com/office/drawing/2014/main" id="{B0B7626F-B325-FE99-2ACC-D2CD39395A9A}"/>
+                <a16:creationId xmlns:a16="http://schemas.microsoft.com/office/drawing/2014/main" id="{11243EE1-7DC5-56AC-A901-A6A318906A6D}"/>
               </a:ext>
             </a:extLst>
           </p:cNvPr>
@@ -12076,8 +12565,8 @@
         </p:blipFill>
         <p:spPr>
           <a:xfrm>
-            <a:off x="5207016" y="2328998"/>
-            <a:ext cx="5665120" cy="3645672"/>
+            <a:off x="419738" y="2549412"/>
+            <a:ext cx="5212994" cy="3335097"/>
           </a:xfrm>
           <a:prstGeom prst="rect">
             <a:avLst/>
@@ -12718,8 +13207,8 @@
         </p:nvSpPr>
         <p:spPr>
           <a:xfrm>
-            <a:off x="1097279" y="5891439"/>
-            <a:ext cx="4535458" cy="307777"/>
+            <a:off x="930211" y="5918103"/>
+            <a:ext cx="4535458" cy="369332"/>
           </a:xfrm>
           <a:prstGeom prst="rect">
             <a:avLst/>
@@ -12732,6 +13221,7 @@
           </a:bodyPr>
           <a:lstStyle/>
           <a:p>
+            <a:pPr algn="ctr"/>
             <a:r>
               <a:rPr lang="en-SG" sz="1400" b="1" dirty="0"/>
               <a:t>Muon beam </a:t>
@@ -12746,7 +13236,19 @@
             </a:r>
             <a:r>
               <a:rPr lang="en-US" sz="1400" b="1" dirty="0"/>
-              <a:t>from lane’s paper</a:t>
+              <a:t>from </a:t>
+            </a:r>
+            <a:r>
+              <a:rPr lang="en-US" b="1" dirty="0" err="1">
+                <a:solidFill>
+                  <a:srgbClr val="FF0000"/>
+                </a:solidFill>
+              </a:rPr>
+              <a:t>NuMI</a:t>
+            </a:r>
+            <a:r>
+              <a:rPr lang="en-US" sz="1400" b="1" dirty="0"/>
+              <a:t> selection</a:t>
             </a:r>
             <a:endParaRPr lang="en-SG" sz="1400" b="1" dirty="0"/>
           </a:p>
@@ -12766,8 +13268,8 @@
         </p:nvSpPr>
         <p:spPr>
           <a:xfrm>
-            <a:off x="6559265" y="5919306"/>
-            <a:ext cx="5174508" cy="307777"/>
+            <a:off x="6434588" y="5918103"/>
+            <a:ext cx="5174508" cy="369332"/>
           </a:xfrm>
           <a:prstGeom prst="rect">
             <a:avLst/>
@@ -12780,6 +13282,7 @@
           </a:bodyPr>
           <a:lstStyle/>
           <a:p>
+            <a:pPr algn="ctr"/>
             <a:r>
               <a:rPr lang="en-SG" sz="1400" b="1" dirty="0"/>
               <a:t>Muon beam </a:t>
@@ -12794,7 +13297,19 @@
             </a:r>
             <a:r>
               <a:rPr lang="en-US" sz="1400" b="1" dirty="0"/>
-              <a:t>from my BNB sample</a:t>
+              <a:t>from my </a:t>
+            </a:r>
+            <a:r>
+              <a:rPr lang="en-US" b="1" dirty="0">
+                <a:solidFill>
+                  <a:srgbClr val="FF0000"/>
+                </a:solidFill>
+              </a:rPr>
+              <a:t>BNB</a:t>
+            </a:r>
+            <a:r>
+              <a:rPr lang="en-US" sz="1400" b="1" dirty="0"/>
+              <a:t> selection</a:t>
             </a:r>
             <a:endParaRPr lang="en-SG" sz="1400" b="1" dirty="0"/>
           </a:p>
@@ -12802,10 +13317,10 @@
       </p:sp>
       <p:pic>
         <p:nvPicPr>
-          <p:cNvPr id="8" name="Picture 7">
+          <p:cNvPr id="3" name="Picture 2">
             <a:extLst>
               <a:ext uri="{FF2B5EF4-FFF2-40B4-BE49-F238E27FC236}">
-                <a16:creationId xmlns:a16="http://schemas.microsoft.com/office/drawing/2014/main" id="{1EA54FED-C336-B542-E357-4139CFB9B5C9}"/>
+                <a16:creationId xmlns:a16="http://schemas.microsoft.com/office/drawing/2014/main" id="{8516AFA2-627E-F1B2-DDC8-E32D61E47AC3}"/>
               </a:ext>
             </a:extLst>
           </p:cNvPr>
@@ -12822,8 +13337,8 @@
         </p:blipFill>
         <p:spPr>
           <a:xfrm>
-            <a:off x="723756" y="2327766"/>
-            <a:ext cx="3669195" cy="3591540"/>
+            <a:off x="6370397" y="2561039"/>
+            <a:ext cx="5247331" cy="3357064"/>
           </a:xfrm>
           <a:prstGeom prst="rect">
             <a:avLst/>
@@ -12832,10 +13347,10 @@
       </p:pic>
       <p:pic>
         <p:nvPicPr>
-          <p:cNvPr id="19" name="Picture 18">
+          <p:cNvPr id="7" name="Picture 6">
             <a:extLst>
               <a:ext uri="{FF2B5EF4-FFF2-40B4-BE49-F238E27FC236}">
-                <a16:creationId xmlns:a16="http://schemas.microsoft.com/office/drawing/2014/main" id="{B665F59D-51B9-D67E-B380-E4EA71ADCFDB}"/>
+                <a16:creationId xmlns:a16="http://schemas.microsoft.com/office/drawing/2014/main" id="{579C07B1-FCAA-5761-860C-D3E1BB41155B}"/>
               </a:ext>
             </a:extLst>
           </p:cNvPr>
@@ -12852,8 +13367,8 @@
         </p:blipFill>
         <p:spPr>
           <a:xfrm>
-            <a:off x="5182553" y="2230551"/>
-            <a:ext cx="5912168" cy="3764791"/>
+            <a:off x="574275" y="2561039"/>
+            <a:ext cx="5247330" cy="3357064"/>
           </a:xfrm>
           <a:prstGeom prst="rect">
             <a:avLst/>
@@ -12977,8 +13492,8 @@
         </p:nvSpPr>
         <p:spPr>
           <a:xfrm>
-            <a:off x="1097279" y="5891439"/>
-            <a:ext cx="4535458" cy="307777"/>
+            <a:off x="1001598" y="5958561"/>
+            <a:ext cx="4535458" cy="369332"/>
           </a:xfrm>
           <a:prstGeom prst="rect">
             <a:avLst/>
@@ -12991,13 +13506,26 @@
           </a:bodyPr>
           <a:lstStyle/>
           <a:p>
+            <a:pPr algn="ctr"/>
             <a:r>
               <a:rPr lang="en-SG" sz="1400" b="1" dirty="0"/>
               <a:t>pi0 momentum </a:t>
             </a:r>
             <a:r>
               <a:rPr lang="en-US" sz="1400" b="1" dirty="0"/>
-              <a:t>from lane’s paper</a:t>
+              <a:t>from </a:t>
+            </a:r>
+            <a:r>
+              <a:rPr lang="en-US" b="1" dirty="0" err="1">
+                <a:solidFill>
+                  <a:srgbClr val="FF0000"/>
+                </a:solidFill>
+              </a:rPr>
+              <a:t>NuMI</a:t>
+            </a:r>
+            <a:r>
+              <a:rPr lang="en-US" sz="1400" b="1" dirty="0"/>
+              <a:t> selection</a:t>
             </a:r>
             <a:endParaRPr lang="en-SG" sz="1400" b="1" dirty="0"/>
           </a:p>
@@ -13017,8 +13545,8 @@
         </p:nvSpPr>
         <p:spPr>
           <a:xfrm>
-            <a:off x="6559265" y="5919306"/>
-            <a:ext cx="5174508" cy="307777"/>
+            <a:off x="6335419" y="5958560"/>
+            <a:ext cx="5174508" cy="369332"/>
           </a:xfrm>
           <a:prstGeom prst="rect">
             <a:avLst/>
@@ -13031,13 +13559,26 @@
           </a:bodyPr>
           <a:lstStyle/>
           <a:p>
+            <a:pPr algn="ctr"/>
             <a:r>
               <a:rPr lang="en-SG" sz="1400" b="1" dirty="0"/>
               <a:t>pi0 momentum </a:t>
             </a:r>
             <a:r>
               <a:rPr lang="en-US" sz="1400" b="1" dirty="0"/>
-              <a:t>from my BNB sample</a:t>
+              <a:t>from </a:t>
+            </a:r>
+            <a:r>
+              <a:rPr lang="en-US" b="1" dirty="0">
+                <a:solidFill>
+                  <a:srgbClr val="FF0000"/>
+                </a:solidFill>
+              </a:rPr>
+              <a:t>BNB</a:t>
+            </a:r>
+            <a:r>
+              <a:rPr lang="en-US" sz="1400" b="1" dirty="0"/>
+              <a:t> selection</a:t>
             </a:r>
             <a:endParaRPr lang="en-SG" sz="1400" b="1" dirty="0"/>
           </a:p>
@@ -13045,10 +13586,10 @@
       </p:sp>
       <p:pic>
         <p:nvPicPr>
-          <p:cNvPr id="5" name="Picture 4">
+          <p:cNvPr id="9" name="Picture 8">
             <a:extLst>
               <a:ext uri="{FF2B5EF4-FFF2-40B4-BE49-F238E27FC236}">
-                <a16:creationId xmlns:a16="http://schemas.microsoft.com/office/drawing/2014/main" id="{3D091AC2-1EC3-D1B0-0773-9F778FF85BC4}"/>
+                <a16:creationId xmlns:a16="http://schemas.microsoft.com/office/drawing/2014/main" id="{3E2E45C0-DCED-00DE-F08C-5EF7DA14C132}"/>
               </a:ext>
             </a:extLst>
           </p:cNvPr>
@@ -13065,8 +13606,8 @@
         </p:blipFill>
         <p:spPr>
           <a:xfrm>
-            <a:off x="655782" y="2184410"/>
-            <a:ext cx="3890235" cy="3734896"/>
+            <a:off x="587727" y="2598110"/>
+            <a:ext cx="5332487" cy="3360450"/>
           </a:xfrm>
           <a:prstGeom prst="rect">
             <a:avLst/>
@@ -13075,10 +13616,10 @@
       </p:pic>
       <p:pic>
         <p:nvPicPr>
-          <p:cNvPr id="13" name="Picture 12">
+          <p:cNvPr id="11" name="Picture 10">
             <a:extLst>
               <a:ext uri="{FF2B5EF4-FFF2-40B4-BE49-F238E27FC236}">
-                <a16:creationId xmlns:a16="http://schemas.microsoft.com/office/drawing/2014/main" id="{E893B3D5-074D-8C1F-0C52-A536699B31BB}"/>
+                <a16:creationId xmlns:a16="http://schemas.microsoft.com/office/drawing/2014/main" id="{366F012A-2541-07B0-B8F2-2D0CB4476E4A}"/>
               </a:ext>
             </a:extLst>
           </p:cNvPr>
@@ -13095,8 +13636,8 @@
         </p:blipFill>
         <p:spPr>
           <a:xfrm>
-            <a:off x="4987514" y="2231300"/>
-            <a:ext cx="5795819" cy="3729780"/>
+            <a:off x="6271786" y="2598110"/>
+            <a:ext cx="5332487" cy="3360450"/>
           </a:xfrm>
           <a:prstGeom prst="rect">
             <a:avLst/>
@@ -13238,8 +13779,8 @@
         </p:nvSpPr>
         <p:spPr>
           <a:xfrm>
-            <a:off x="1097279" y="5891439"/>
-            <a:ext cx="4535458" cy="307777"/>
+            <a:off x="686537" y="5927653"/>
+            <a:ext cx="4535458" cy="369332"/>
           </a:xfrm>
           <a:prstGeom prst="rect">
             <a:avLst/>
@@ -13252,6 +13793,7 @@
           </a:bodyPr>
           <a:lstStyle/>
           <a:p>
+            <a:pPr algn="ctr"/>
             <a:r>
               <a:rPr lang="en-SG" sz="1400" b="1" dirty="0"/>
               <a:t>pi0 beam </a:t>
@@ -13266,7 +13808,19 @@
             </a:r>
             <a:r>
               <a:rPr lang="en-US" sz="1400" b="1" dirty="0"/>
-              <a:t>from lane’s paper</a:t>
+              <a:t>from </a:t>
+            </a:r>
+            <a:r>
+              <a:rPr lang="en-US" b="1" dirty="0" err="1">
+                <a:solidFill>
+                  <a:srgbClr val="FF0000"/>
+                </a:solidFill>
+              </a:rPr>
+              <a:t>NuMI</a:t>
+            </a:r>
+            <a:r>
+              <a:rPr lang="en-US" sz="1400" b="1" dirty="0"/>
+              <a:t> selection</a:t>
             </a:r>
             <a:endParaRPr lang="en-SG" sz="1400" b="1" dirty="0"/>
           </a:p>
@@ -13286,8 +13840,8 @@
         </p:nvSpPr>
         <p:spPr>
           <a:xfrm>
-            <a:off x="6552049" y="5891438"/>
-            <a:ext cx="5174508" cy="307777"/>
+            <a:off x="6395408" y="5891438"/>
+            <a:ext cx="5174508" cy="369332"/>
           </a:xfrm>
           <a:prstGeom prst="rect">
             <a:avLst/>
@@ -13300,6 +13854,7 @@
           </a:bodyPr>
           <a:lstStyle/>
           <a:p>
+            <a:pPr algn="ctr"/>
             <a:r>
               <a:rPr lang="en-SG" sz="1400" b="1" dirty="0"/>
               <a:t>pi0 beam </a:t>
@@ -13314,7 +13869,19 @@
             </a:r>
             <a:r>
               <a:rPr lang="en-US" sz="1400" b="1" dirty="0"/>
-              <a:t>from my BNB sample</a:t>
+              <a:t>from </a:t>
+            </a:r>
+            <a:r>
+              <a:rPr lang="en-US" b="1" dirty="0">
+                <a:solidFill>
+                  <a:srgbClr val="FF0000"/>
+                </a:solidFill>
+              </a:rPr>
+              <a:t>BNB</a:t>
+            </a:r>
+            <a:r>
+              <a:rPr lang="en-US" sz="1400" b="1" dirty="0"/>
+              <a:t> selection</a:t>
             </a:r>
             <a:endParaRPr lang="en-SG" sz="1400" b="1" dirty="0"/>
           </a:p>
@@ -13322,10 +13889,10 @@
       </p:sp>
       <p:pic>
         <p:nvPicPr>
-          <p:cNvPr id="6" name="Picture 5">
+          <p:cNvPr id="3" name="Picture 2">
             <a:extLst>
               <a:ext uri="{FF2B5EF4-FFF2-40B4-BE49-F238E27FC236}">
-                <a16:creationId xmlns:a16="http://schemas.microsoft.com/office/drawing/2014/main" id="{3576670C-2E4B-8829-8707-16511E67192B}"/>
+                <a16:creationId xmlns:a16="http://schemas.microsoft.com/office/drawing/2014/main" id="{F2E899C8-BE21-F46B-F2E0-1E1ED9F5135B}"/>
               </a:ext>
             </a:extLst>
           </p:cNvPr>
@@ -13342,8 +13909,8 @@
         </p:blipFill>
         <p:spPr>
           <a:xfrm>
-            <a:off x="695326" y="2408397"/>
-            <a:ext cx="3645044" cy="3483042"/>
+            <a:off x="6552050" y="2491232"/>
+            <a:ext cx="5371372" cy="3436421"/>
           </a:xfrm>
           <a:prstGeom prst="rect">
             <a:avLst/>
@@ -13352,10 +13919,10 @@
       </p:pic>
       <p:pic>
         <p:nvPicPr>
-          <p:cNvPr id="12" name="Picture 11">
+          <p:cNvPr id="7" name="Picture 6">
             <a:extLst>
               <a:ext uri="{FF2B5EF4-FFF2-40B4-BE49-F238E27FC236}">
-                <a16:creationId xmlns:a16="http://schemas.microsoft.com/office/drawing/2014/main" id="{E9D4212B-D1B2-C1DB-A9BE-DB2C73E4E805}"/>
+                <a16:creationId xmlns:a16="http://schemas.microsoft.com/office/drawing/2014/main" id="{E62CEADA-9263-B9DB-82B5-E7F5157F0BF4}"/>
               </a:ext>
             </a:extLst>
           </p:cNvPr>
@@ -13372,8 +13939,8 @@
         </p:blipFill>
         <p:spPr>
           <a:xfrm>
-            <a:off x="5259682" y="2391762"/>
-            <a:ext cx="5576888" cy="3551290"/>
+            <a:off x="268578" y="2491232"/>
+            <a:ext cx="5371371" cy="3436421"/>
           </a:xfrm>
           <a:prstGeom prst="rect">
             <a:avLst/>
@@ -15117,7 +15684,11 @@
               <a:t>Reconstructed neutral pion mass plot from </a:t>
             </a:r>
             <a:r>
-              <a:rPr lang="en-US" b="1" dirty="0" err="1"/>
+              <a:rPr lang="en-US" b="1" dirty="0" err="1">
+                <a:solidFill>
+                  <a:srgbClr val="FF0000"/>
+                </a:solidFill>
+              </a:rPr>
               <a:t>NuMI</a:t>
             </a:r>
             <a:r>
@@ -15161,7 +15732,11 @@
               <a:t>Reconstructed neutral pion mass plot from my </a:t>
             </a:r>
             <a:r>
-              <a:rPr lang="en-US" b="1" dirty="0"/>
+              <a:rPr lang="en-US" b="1" dirty="0">
+                <a:solidFill>
+                  <a:srgbClr val="FF0000"/>
+                </a:solidFill>
+              </a:rPr>
               <a:t>BNB</a:t>
             </a:r>
             <a:r>
@@ -15174,10 +15749,10 @@
       </p:sp>
       <p:pic>
         <p:nvPicPr>
-          <p:cNvPr id="19" name="Picture 18">
+          <p:cNvPr id="6" name="Picture 5">
             <a:extLst>
               <a:ext uri="{FF2B5EF4-FFF2-40B4-BE49-F238E27FC236}">
-                <a16:creationId xmlns:a16="http://schemas.microsoft.com/office/drawing/2014/main" id="{DE562C6B-89AA-A159-3461-108938311981}"/>
+                <a16:creationId xmlns:a16="http://schemas.microsoft.com/office/drawing/2014/main" id="{80EEFA87-C938-C2D2-0ED6-E1CBDC5832FB}"/>
               </a:ext>
             </a:extLst>
           </p:cNvPr>
@@ -15194,8 +15769,8 @@
         </p:blipFill>
         <p:spPr>
           <a:xfrm>
-            <a:off x="6457107" y="2539077"/>
-            <a:ext cx="5017769" cy="3195250"/>
+            <a:off x="6457109" y="2611917"/>
+            <a:ext cx="4863839" cy="3111719"/>
           </a:xfrm>
           <a:prstGeom prst="rect">
             <a:avLst/>
@@ -15204,10 +15779,10 @@
       </p:pic>
       <p:pic>
         <p:nvPicPr>
-          <p:cNvPr id="7" name="Picture 6">
+          <p:cNvPr id="9" name="Picture 8">
             <a:extLst>
               <a:ext uri="{FF2B5EF4-FFF2-40B4-BE49-F238E27FC236}">
-                <a16:creationId xmlns:a16="http://schemas.microsoft.com/office/drawing/2014/main" id="{A4FD2C72-4BBD-E1AD-7F50-EA113C719F3E}"/>
+                <a16:creationId xmlns:a16="http://schemas.microsoft.com/office/drawing/2014/main" id="{5646827C-F327-FF4B-DB29-2E7FCA25885B}"/>
               </a:ext>
             </a:extLst>
           </p:cNvPr>
@@ -15224,8 +15799,8 @@
         </p:blipFill>
         <p:spPr>
           <a:xfrm>
-            <a:off x="717124" y="2494554"/>
-            <a:ext cx="5017769" cy="3229082"/>
+            <a:off x="871052" y="2611916"/>
+            <a:ext cx="4863839" cy="3111719"/>
           </a:xfrm>
           <a:prstGeom prst="rect">
             <a:avLst/>
@@ -15382,7 +15957,11 @@
               <a:t>Crystal ball fitting plot from </a:t>
             </a:r>
             <a:r>
-              <a:rPr lang="en-US" b="1" dirty="0" err="1"/>
+              <a:rPr lang="en-US" b="1" dirty="0" err="1">
+                <a:solidFill>
+                  <a:srgbClr val="FF0000"/>
+                </a:solidFill>
+              </a:rPr>
               <a:t>NuMI</a:t>
             </a:r>
             <a:r>
@@ -15434,7 +16013,11 @@
               <a:t>from </a:t>
             </a:r>
             <a:r>
-              <a:rPr lang="en-US" b="1" dirty="0"/>
+              <a:rPr lang="en-US" b="1" dirty="0">
+                <a:solidFill>
+                  <a:srgbClr val="FF0000"/>
+                </a:solidFill>
+              </a:rPr>
               <a:t>BNB</a:t>
             </a:r>
             <a:r>
@@ -15669,7 +16252,11 @@
               <a:t>Reconstructed Pi0 mass plot from </a:t>
             </a:r>
             <a:r>
-              <a:rPr lang="en-US" b="1" dirty="0" err="1"/>
+              <a:rPr lang="en-US" b="1" dirty="0" err="1">
+                <a:solidFill>
+                  <a:srgbClr val="FF0000"/>
+                </a:solidFill>
+              </a:rPr>
               <a:t>NuMI</a:t>
             </a:r>
             <a:r>
@@ -15714,7 +16301,11 @@
               <a:t>Reconstructed Pi0 mass plot from </a:t>
             </a:r>
             <a:r>
-              <a:rPr lang="en-US" b="1" dirty="0"/>
+              <a:rPr lang="en-US" b="1" dirty="0">
+                <a:solidFill>
+                  <a:srgbClr val="FF0000"/>
+                </a:solidFill>
+              </a:rPr>
               <a:t>BNB</a:t>
             </a:r>
             <a:r>
@@ -15727,10 +16318,10 @@
       </p:sp>
       <p:pic>
         <p:nvPicPr>
-          <p:cNvPr id="15" name="Picture 14">
+          <p:cNvPr id="3" name="Picture 2">
             <a:extLst>
               <a:ext uri="{FF2B5EF4-FFF2-40B4-BE49-F238E27FC236}">
-                <a16:creationId xmlns:a16="http://schemas.microsoft.com/office/drawing/2014/main" id="{5794562C-D8E4-D596-F967-B4F34891E3D3}"/>
+                <a16:creationId xmlns:a16="http://schemas.microsoft.com/office/drawing/2014/main" id="{7C42A09E-5B51-A226-01E6-B278538455F6}"/>
               </a:ext>
             </a:extLst>
           </p:cNvPr>
@@ -15747,8 +16338,8 @@
         </p:blipFill>
         <p:spPr>
           <a:xfrm>
-            <a:off x="6670301" y="2959213"/>
-            <a:ext cx="4783426" cy="3046023"/>
+            <a:off x="6681437" y="2959213"/>
+            <a:ext cx="4761151" cy="3046023"/>
           </a:xfrm>
           <a:prstGeom prst="rect">
             <a:avLst/>
@@ -15757,10 +16348,10 @@
       </p:pic>
       <p:pic>
         <p:nvPicPr>
-          <p:cNvPr id="12" name="Picture 11">
+          <p:cNvPr id="6" name="Picture 5">
             <a:extLst>
               <a:ext uri="{FF2B5EF4-FFF2-40B4-BE49-F238E27FC236}">
-                <a16:creationId xmlns:a16="http://schemas.microsoft.com/office/drawing/2014/main" id="{9024BE88-EE01-5C73-E0C6-28454843F484}"/>
+                <a16:creationId xmlns:a16="http://schemas.microsoft.com/office/drawing/2014/main" id="{5DE3E277-0BC5-6275-BD6E-1FC35FAAA41D}"/>
               </a:ext>
             </a:extLst>
           </p:cNvPr>
@@ -15777,8 +16368,8 @@
         </p:blipFill>
         <p:spPr>
           <a:xfrm>
-            <a:off x="738272" y="2930362"/>
-            <a:ext cx="4778141" cy="3074874"/>
+            <a:off x="746767" y="2959213"/>
+            <a:ext cx="4761151" cy="3046023"/>
           </a:xfrm>
           <a:prstGeom prst="rect">
             <a:avLst/>

--- a/Update_Slides/FYP_Weekly_Update_Slides_12March.pptx
+++ b/Update_Slides/FYP_Weekly_Update_Slides_12March.pptx
@@ -8407,10 +8407,10 @@
       </p:sp>
       <p:pic>
         <p:nvPicPr>
-          <p:cNvPr id="7" name="Picture 6">
+          <p:cNvPr id="6" name="Picture 5">
             <a:extLst>
               <a:ext uri="{FF2B5EF4-FFF2-40B4-BE49-F238E27FC236}">
-                <a16:creationId xmlns:a16="http://schemas.microsoft.com/office/drawing/2014/main" id="{55D9FBC7-2661-2864-C572-1615606BEA3E}"/>
+                <a16:creationId xmlns:a16="http://schemas.microsoft.com/office/drawing/2014/main" id="{13AA2A3D-282B-5648-1C73-F45FFFDA34A5}"/>
               </a:ext>
             </a:extLst>
           </p:cNvPr>
@@ -8427,8 +8427,8 @@
         </p:blipFill>
         <p:spPr>
           <a:xfrm>
-            <a:off x="6330611" y="2548180"/>
-            <a:ext cx="5250933" cy="3359369"/>
+            <a:off x="6330610" y="2548181"/>
+            <a:ext cx="5220225" cy="3359369"/>
           </a:xfrm>
           <a:prstGeom prst="rect">
             <a:avLst/>
@@ -8437,10 +8437,10 @@
       </p:pic>
       <p:pic>
         <p:nvPicPr>
-          <p:cNvPr id="9" name="Picture 8">
+          <p:cNvPr id="5" name="Picture 4">
             <a:extLst>
               <a:ext uri="{FF2B5EF4-FFF2-40B4-BE49-F238E27FC236}">
-                <a16:creationId xmlns:a16="http://schemas.microsoft.com/office/drawing/2014/main" id="{617CB798-6089-526E-80FC-798BB49757EE}"/>
+                <a16:creationId xmlns:a16="http://schemas.microsoft.com/office/drawing/2014/main" id="{75382A52-CDB0-9294-3E07-FC994D273AB9}"/>
               </a:ext>
             </a:extLst>
           </p:cNvPr>
@@ -8457,8 +8457,8 @@
         </p:blipFill>
         <p:spPr>
           <a:xfrm>
-            <a:off x="610456" y="2548179"/>
-            <a:ext cx="5250933" cy="3359369"/>
+            <a:off x="641165" y="2548180"/>
+            <a:ext cx="5220226" cy="3359369"/>
           </a:xfrm>
           <a:prstGeom prst="rect">
             <a:avLst/>
@@ -8666,10 +8666,10 @@
       </p:sp>
       <p:pic>
         <p:nvPicPr>
-          <p:cNvPr id="5" name="Picture 4">
+          <p:cNvPr id="13" name="Picture 12">
             <a:extLst>
               <a:ext uri="{FF2B5EF4-FFF2-40B4-BE49-F238E27FC236}">
-                <a16:creationId xmlns:a16="http://schemas.microsoft.com/office/drawing/2014/main" id="{6B90A1A7-8F82-7CFB-32CF-FF1A76276903}"/>
+                <a16:creationId xmlns:a16="http://schemas.microsoft.com/office/drawing/2014/main" id="{2E1A537E-6C57-AA90-4EED-C1532731497A}"/>
               </a:ext>
             </a:extLst>
           </p:cNvPr>
@@ -8686,8 +8686,8 @@
         </p:blipFill>
         <p:spPr>
           <a:xfrm>
-            <a:off x="6463463" y="2609564"/>
-            <a:ext cx="5051179" cy="3231573"/>
+            <a:off x="6463462" y="2609565"/>
+            <a:ext cx="5021641" cy="3231573"/>
           </a:xfrm>
           <a:prstGeom prst="rect">
             <a:avLst/>
@@ -8696,10 +8696,10 @@
       </p:pic>
       <p:pic>
         <p:nvPicPr>
-          <p:cNvPr id="7" name="Picture 6">
+          <p:cNvPr id="8" name="Picture 7">
             <a:extLst>
               <a:ext uri="{FF2B5EF4-FFF2-40B4-BE49-F238E27FC236}">
-                <a16:creationId xmlns:a16="http://schemas.microsoft.com/office/drawing/2014/main" id="{5A87ADF5-4CFF-BC3B-ABC7-7A19D6650E17}"/>
+                <a16:creationId xmlns:a16="http://schemas.microsoft.com/office/drawing/2014/main" id="{A29CCDF0-39A9-4AEB-D808-89F1A5A52579}"/>
               </a:ext>
             </a:extLst>
           </p:cNvPr>
@@ -8716,8 +8716,8 @@
         </p:blipFill>
         <p:spPr>
           <a:xfrm>
-            <a:off x="677358" y="2604083"/>
-            <a:ext cx="5051179" cy="3231573"/>
+            <a:off x="706899" y="2609564"/>
+            <a:ext cx="5021640" cy="3231573"/>
           </a:xfrm>
           <a:prstGeom prst="rect">
             <a:avLst/>
@@ -8925,10 +8925,10 @@
       </p:sp>
       <p:pic>
         <p:nvPicPr>
-          <p:cNvPr id="3" name="Picture 2">
+          <p:cNvPr id="6" name="Picture 5">
             <a:extLst>
               <a:ext uri="{FF2B5EF4-FFF2-40B4-BE49-F238E27FC236}">
-                <a16:creationId xmlns:a16="http://schemas.microsoft.com/office/drawing/2014/main" id="{BB461715-2381-61A2-8A34-2A003666F90C}"/>
+                <a16:creationId xmlns:a16="http://schemas.microsoft.com/office/drawing/2014/main" id="{C9EF778C-26CD-6627-08BC-EB1E9CB97E86}"/>
               </a:ext>
             </a:extLst>
           </p:cNvPr>
@@ -8945,8 +8945,8 @@
         </p:blipFill>
         <p:spPr>
           <a:xfrm>
-            <a:off x="6465456" y="2532286"/>
-            <a:ext cx="5211906" cy="3334401"/>
+            <a:off x="6465457" y="2512673"/>
+            <a:ext cx="5211906" cy="3354015"/>
           </a:xfrm>
           <a:prstGeom prst="rect">
             <a:avLst/>
@@ -8955,10 +8955,10 @@
       </p:pic>
       <p:pic>
         <p:nvPicPr>
-          <p:cNvPr id="7" name="Picture 6">
+          <p:cNvPr id="8" name="Picture 7">
             <a:extLst>
               <a:ext uri="{FF2B5EF4-FFF2-40B4-BE49-F238E27FC236}">
-                <a16:creationId xmlns:a16="http://schemas.microsoft.com/office/drawing/2014/main" id="{54FA6896-55E2-DC1F-587A-D2E96CFB839B}"/>
+                <a16:creationId xmlns:a16="http://schemas.microsoft.com/office/drawing/2014/main" id="{F1AD9C73-7EAD-FE79-2C27-D31A5E49B2BF}"/>
               </a:ext>
             </a:extLst>
           </p:cNvPr>
@@ -8975,8 +8975,8 @@
         </p:blipFill>
         <p:spPr>
           <a:xfrm>
-            <a:off x="514637" y="2532286"/>
-            <a:ext cx="5211906" cy="3334401"/>
+            <a:off x="514638" y="2512673"/>
+            <a:ext cx="5211906" cy="3354015"/>
           </a:xfrm>
           <a:prstGeom prst="rect">
             <a:avLst/>
@@ -9184,10 +9184,10 @@
       </p:sp>
       <p:pic>
         <p:nvPicPr>
-          <p:cNvPr id="12" name="Picture 11">
+          <p:cNvPr id="8" name="Picture 7">
             <a:extLst>
               <a:ext uri="{FF2B5EF4-FFF2-40B4-BE49-F238E27FC236}">
-                <a16:creationId xmlns:a16="http://schemas.microsoft.com/office/drawing/2014/main" id="{90D9C6DF-5128-9824-29EE-EA9C832F1109}"/>
+                <a16:creationId xmlns:a16="http://schemas.microsoft.com/office/drawing/2014/main" id="{A53A016E-0351-067D-ABEE-19B9AC3FAFC7}"/>
               </a:ext>
             </a:extLst>
           </p:cNvPr>
@@ -9204,8 +9204,8 @@
         </p:blipFill>
         <p:spPr>
           <a:xfrm>
-            <a:off x="6329683" y="2440599"/>
-            <a:ext cx="5419088" cy="3466949"/>
+            <a:off x="6329680" y="2440601"/>
+            <a:ext cx="5387398" cy="3466949"/>
           </a:xfrm>
           <a:prstGeom prst="rect">
             <a:avLst/>
@@ -9214,10 +9214,10 @@
       </p:pic>
       <p:pic>
         <p:nvPicPr>
-          <p:cNvPr id="16" name="Picture 15">
+          <p:cNvPr id="6" name="Picture 5">
             <a:extLst>
               <a:ext uri="{FF2B5EF4-FFF2-40B4-BE49-F238E27FC236}">
-                <a16:creationId xmlns:a16="http://schemas.microsoft.com/office/drawing/2014/main" id="{6A70595B-408B-8D4A-D0DC-D0BAFCF6622B}"/>
+                <a16:creationId xmlns:a16="http://schemas.microsoft.com/office/drawing/2014/main" id="{60166726-0193-EC34-7411-FB81D132510C}"/>
               </a:ext>
             </a:extLst>
           </p:cNvPr>
@@ -9234,8 +9234,8 @@
         </p:blipFill>
         <p:spPr>
           <a:xfrm>
-            <a:off x="443229" y="2440599"/>
-            <a:ext cx="5419088" cy="3466949"/>
+            <a:off x="474923" y="2440601"/>
+            <a:ext cx="5387398" cy="3466949"/>
           </a:xfrm>
           <a:prstGeom prst="rect">
             <a:avLst/>
@@ -9454,10 +9454,10 @@
       </p:sp>
       <p:pic>
         <p:nvPicPr>
-          <p:cNvPr id="6" name="Picture 5">
+          <p:cNvPr id="9" name="Picture 8">
             <a:extLst>
               <a:ext uri="{FF2B5EF4-FFF2-40B4-BE49-F238E27FC236}">
-                <a16:creationId xmlns:a16="http://schemas.microsoft.com/office/drawing/2014/main" id="{6AD04FF4-0200-23BA-7D23-BD43B23DC730}"/>
+                <a16:creationId xmlns:a16="http://schemas.microsoft.com/office/drawing/2014/main" id="{EAEF0C49-FF93-5F64-0E88-D4C661644504}"/>
               </a:ext>
             </a:extLst>
           </p:cNvPr>
@@ -9474,8 +9474,8 @@
         </p:blipFill>
         <p:spPr>
           <a:xfrm>
-            <a:off x="6391565" y="2606448"/>
-            <a:ext cx="5326850" cy="3284991"/>
+            <a:off x="6391564" y="2696363"/>
+            <a:ext cx="5105110" cy="3195075"/>
           </a:xfrm>
           <a:prstGeom prst="rect">
             <a:avLst/>
@@ -9484,10 +9484,10 @@
       </p:pic>
       <p:pic>
         <p:nvPicPr>
-          <p:cNvPr id="8" name="Picture 7">
+          <p:cNvPr id="5" name="Picture 4">
             <a:extLst>
               <a:ext uri="{FF2B5EF4-FFF2-40B4-BE49-F238E27FC236}">
-                <a16:creationId xmlns:a16="http://schemas.microsoft.com/office/drawing/2014/main" id="{D38ED42D-582B-4CAC-7247-A939B06530AE}"/>
+                <a16:creationId xmlns:a16="http://schemas.microsoft.com/office/drawing/2014/main" id="{4137EEDE-04A5-5590-BDF3-B89471CD0165}"/>
               </a:ext>
             </a:extLst>
           </p:cNvPr>
@@ -9504,8 +9504,8 @@
         </p:blipFill>
         <p:spPr>
           <a:xfrm>
-            <a:off x="473585" y="2606448"/>
-            <a:ext cx="5326850" cy="3284991"/>
+            <a:off x="695326" y="2696363"/>
+            <a:ext cx="5105111" cy="3195075"/>
           </a:xfrm>
           <a:prstGeom prst="rect">
             <a:avLst/>
@@ -10083,10 +10083,10 @@
       </p:sp>
       <p:pic>
         <p:nvPicPr>
-          <p:cNvPr id="5" name="Picture 4">
+          <p:cNvPr id="11" name="Picture 10">
             <a:extLst>
               <a:ext uri="{FF2B5EF4-FFF2-40B4-BE49-F238E27FC236}">
-                <a16:creationId xmlns:a16="http://schemas.microsoft.com/office/drawing/2014/main" id="{D5C1511D-D858-B195-5624-CE06C1BBC944}"/>
+                <a16:creationId xmlns:a16="http://schemas.microsoft.com/office/drawing/2014/main" id="{C807AAA6-304F-AF8B-9AF5-8D26B0D0785A}"/>
               </a:ext>
             </a:extLst>
           </p:cNvPr>
@@ -10103,8 +10103,8 @@
         </p:blipFill>
         <p:spPr>
           <a:xfrm>
-            <a:off x="6441240" y="2410965"/>
-            <a:ext cx="5557607" cy="3404268"/>
+            <a:off x="6441239" y="2410965"/>
+            <a:ext cx="5526490" cy="3404268"/>
           </a:xfrm>
           <a:prstGeom prst="rect">
             <a:avLst/>
@@ -10113,10 +10113,10 @@
       </p:pic>
       <p:pic>
         <p:nvPicPr>
-          <p:cNvPr id="8" name="Picture 7">
+          <p:cNvPr id="6" name="Picture 5">
             <a:extLst>
               <a:ext uri="{FF2B5EF4-FFF2-40B4-BE49-F238E27FC236}">
-                <a16:creationId xmlns:a16="http://schemas.microsoft.com/office/drawing/2014/main" id="{DDA11C10-86F6-B1C9-42E2-4168F8B2FF0D}"/>
+                <a16:creationId xmlns:a16="http://schemas.microsoft.com/office/drawing/2014/main" id="{8329B5CD-612C-4B71-1F79-ACBA533A019D}"/>
               </a:ext>
             </a:extLst>
           </p:cNvPr>
@@ -10133,8 +10133,8 @@
         </p:blipFill>
         <p:spPr>
           <a:xfrm>
-            <a:off x="193153" y="2413274"/>
-            <a:ext cx="5557607" cy="3404268"/>
+            <a:off x="224272" y="2410965"/>
+            <a:ext cx="5526490" cy="3404268"/>
           </a:xfrm>
           <a:prstGeom prst="rect">
             <a:avLst/>
@@ -10335,47 +10335,12 @@
           </a:p>
         </p:txBody>
       </p:sp>
-      <p:sp>
-        <p:nvSpPr>
-          <p:cNvPr id="9" name="TextBox 8">
+      <p:pic>
+        <p:nvPicPr>
+          <p:cNvPr id="6" name="Picture 5">
             <a:extLst>
               <a:ext uri="{FF2B5EF4-FFF2-40B4-BE49-F238E27FC236}">
-                <a16:creationId xmlns:a16="http://schemas.microsoft.com/office/drawing/2014/main" id="{9789EE1C-A6DB-5E04-2418-F4563CE3DE96}"/>
-              </a:ext>
-            </a:extLst>
-          </p:cNvPr>
-          <p:cNvSpPr txBox="1"/>
-          <p:nvPr/>
-        </p:nvSpPr>
-        <p:spPr>
-          <a:xfrm>
-            <a:off x="1097279" y="1815053"/>
-            <a:ext cx="10399395" cy="338554"/>
-          </a:xfrm>
-          <a:prstGeom prst="rect">
-            <a:avLst/>
-          </a:prstGeom>
-          <a:noFill/>
-        </p:spPr>
-        <p:txBody>
-          <a:bodyPr wrap="square">
-            <a:spAutoFit/>
-          </a:bodyPr>
-          <a:lstStyle/>
-          <a:p>
-            <a:r>
-              <a:rPr lang="en-US" sz="1600" b="1" dirty="0"/>
-              <a:t>Plotting Reconstructed Transverse momentum imbalance</a:t>
-            </a:r>
-          </a:p>
-        </p:txBody>
-      </p:sp>
-      <p:pic>
-        <p:nvPicPr>
-          <p:cNvPr id="7" name="Picture 6">
-            <a:extLst>
-              <a:ext uri="{FF2B5EF4-FFF2-40B4-BE49-F238E27FC236}">
-                <a16:creationId xmlns:a16="http://schemas.microsoft.com/office/drawing/2014/main" id="{12988604-F653-BD29-0789-32E84B9F286E}"/>
+                <a16:creationId xmlns:a16="http://schemas.microsoft.com/office/drawing/2014/main" id="{B910A3DA-35A3-0643-177A-101E6E6D0734}"/>
               </a:ext>
             </a:extLst>
           </p:cNvPr>
@@ -10392,20 +10357,55 @@
         </p:blipFill>
         <p:spPr>
           <a:xfrm>
-            <a:off x="6708960" y="2794430"/>
-            <a:ext cx="4986616" cy="3113788"/>
+            <a:off x="6708961" y="2763366"/>
+            <a:ext cx="4986619" cy="3128073"/>
           </a:xfrm>
           <a:prstGeom prst="rect">
             <a:avLst/>
           </a:prstGeom>
         </p:spPr>
       </p:pic>
+      <p:sp>
+        <p:nvSpPr>
+          <p:cNvPr id="9" name="TextBox 8">
+            <a:extLst>
+              <a:ext uri="{FF2B5EF4-FFF2-40B4-BE49-F238E27FC236}">
+                <a16:creationId xmlns:a16="http://schemas.microsoft.com/office/drawing/2014/main" id="{9789EE1C-A6DB-5E04-2418-F4563CE3DE96}"/>
+              </a:ext>
+            </a:extLst>
+          </p:cNvPr>
+          <p:cNvSpPr txBox="1"/>
+          <p:nvPr/>
+        </p:nvSpPr>
+        <p:spPr>
+          <a:xfrm>
+            <a:off x="1097279" y="1815053"/>
+            <a:ext cx="10399395" cy="338554"/>
+          </a:xfrm>
+          <a:prstGeom prst="rect">
+            <a:avLst/>
+          </a:prstGeom>
+          <a:noFill/>
+        </p:spPr>
+        <p:txBody>
+          <a:bodyPr wrap="square">
+            <a:spAutoFit/>
+          </a:bodyPr>
+          <a:lstStyle/>
+          <a:p>
+            <a:r>
+              <a:rPr lang="en-US" sz="1600" b="1" dirty="0"/>
+              <a:t>Plotting Reconstructed Transverse momentum imbalance</a:t>
+            </a:r>
+          </a:p>
+        </p:txBody>
+      </p:sp>
       <p:pic>
         <p:nvPicPr>
-          <p:cNvPr id="12" name="Picture 11">
+          <p:cNvPr id="4" name="Picture 3">
             <a:extLst>
               <a:ext uri="{FF2B5EF4-FFF2-40B4-BE49-F238E27FC236}">
-                <a16:creationId xmlns:a16="http://schemas.microsoft.com/office/drawing/2014/main" id="{9A856F91-0169-B696-E7D4-5447EBC82DD5}"/>
+                <a16:creationId xmlns:a16="http://schemas.microsoft.com/office/drawing/2014/main" id="{CD9EF2CE-609E-0D09-EC83-7F95AD086431}"/>
               </a:ext>
             </a:extLst>
           </p:cNvPr>
@@ -10422,8 +10422,8 @@
         </p:blipFill>
         <p:spPr>
           <a:xfrm>
-            <a:off x="496425" y="2794430"/>
-            <a:ext cx="4986616" cy="3113789"/>
+            <a:off x="496424" y="2780145"/>
+            <a:ext cx="4986617" cy="3128073"/>
           </a:xfrm>
           <a:prstGeom prst="rect">
             <a:avLst/>
@@ -10630,10 +10630,10 @@
       </p:sp>
       <p:pic>
         <p:nvPicPr>
-          <p:cNvPr id="10" name="Picture 9">
+          <p:cNvPr id="9" name="Picture 8">
             <a:extLst>
               <a:ext uri="{FF2B5EF4-FFF2-40B4-BE49-F238E27FC236}">
-                <a16:creationId xmlns:a16="http://schemas.microsoft.com/office/drawing/2014/main" id="{E9AC443A-6A1B-78E0-F4E6-855B348C12DB}"/>
+                <a16:creationId xmlns:a16="http://schemas.microsoft.com/office/drawing/2014/main" id="{30504486-42CB-5989-717E-5EDB0D54A803}"/>
               </a:ext>
             </a:extLst>
           </p:cNvPr>
@@ -10650,8 +10650,8 @@
         </p:blipFill>
         <p:spPr>
           <a:xfrm>
-            <a:off x="287910" y="2288845"/>
-            <a:ext cx="5511996" cy="3526388"/>
+            <a:off x="6408211" y="2288846"/>
+            <a:ext cx="5479761" cy="3526387"/>
           </a:xfrm>
           <a:prstGeom prst="rect">
             <a:avLst/>
@@ -10660,10 +10660,10 @@
       </p:pic>
       <p:pic>
         <p:nvPicPr>
-          <p:cNvPr id="12" name="Picture 11">
+          <p:cNvPr id="5" name="Picture 4">
             <a:extLst>
               <a:ext uri="{FF2B5EF4-FFF2-40B4-BE49-F238E27FC236}">
-                <a16:creationId xmlns:a16="http://schemas.microsoft.com/office/drawing/2014/main" id="{B6C6A5B7-3F33-51B6-D129-E9AB060C9990}"/>
+                <a16:creationId xmlns:a16="http://schemas.microsoft.com/office/drawing/2014/main" id="{71BE56F6-C684-3891-6D74-6AE5420B955E}"/>
               </a:ext>
             </a:extLst>
           </p:cNvPr>
@@ -10680,8 +10680,8 @@
         </p:blipFill>
         <p:spPr>
           <a:xfrm>
-            <a:off x="6392096" y="2288844"/>
-            <a:ext cx="5511997" cy="3526389"/>
+            <a:off x="304028" y="2288846"/>
+            <a:ext cx="5479761" cy="3526387"/>
           </a:xfrm>
           <a:prstGeom prst="rect">
             <a:avLst/>
@@ -10907,10 +10907,10 @@
       </p:sp>
       <p:pic>
         <p:nvPicPr>
-          <p:cNvPr id="3" name="Picture 2">
+          <p:cNvPr id="6" name="Picture 5">
             <a:extLst>
               <a:ext uri="{FF2B5EF4-FFF2-40B4-BE49-F238E27FC236}">
-                <a16:creationId xmlns:a16="http://schemas.microsoft.com/office/drawing/2014/main" id="{524371C7-75A8-CE28-F8A2-0AD777D98252}"/>
+                <a16:creationId xmlns:a16="http://schemas.microsoft.com/office/drawing/2014/main" id="{A614619B-68B7-C1FE-2A3C-3273F0E14AD3}"/>
               </a:ext>
             </a:extLst>
           </p:cNvPr>
@@ -10927,8 +10927,8 @@
         </p:blipFill>
         <p:spPr>
           <a:xfrm>
-            <a:off x="6559262" y="2808321"/>
-            <a:ext cx="4860809" cy="3109780"/>
+            <a:off x="6559263" y="2763366"/>
+            <a:ext cx="4860809" cy="3128073"/>
           </a:xfrm>
           <a:prstGeom prst="rect">
             <a:avLst/>
@@ -10937,10 +10937,10 @@
       </p:pic>
       <p:pic>
         <p:nvPicPr>
-          <p:cNvPr id="8" name="Picture 7">
+          <p:cNvPr id="5" name="Picture 4">
             <a:extLst>
               <a:ext uri="{FF2B5EF4-FFF2-40B4-BE49-F238E27FC236}">
-                <a16:creationId xmlns:a16="http://schemas.microsoft.com/office/drawing/2014/main" id="{70F1C82E-9977-1CF1-7E66-B1ACA623182D}"/>
+                <a16:creationId xmlns:a16="http://schemas.microsoft.com/office/drawing/2014/main" id="{CE327BD2-64D5-F2AC-1819-DFEAA83F8F43}"/>
               </a:ext>
             </a:extLst>
           </p:cNvPr>
@@ -10957,8 +10957,8 @@
         </p:blipFill>
         <p:spPr>
           <a:xfrm>
-            <a:off x="771927" y="2808321"/>
-            <a:ext cx="4860808" cy="3109780"/>
+            <a:off x="771927" y="2763366"/>
+            <a:ext cx="4860809" cy="3128074"/>
           </a:xfrm>
           <a:prstGeom prst="rect">
             <a:avLst/>
@@ -11176,10 +11176,10 @@
       </p:sp>
       <p:pic>
         <p:nvPicPr>
-          <p:cNvPr id="20" name="Picture 19">
+          <p:cNvPr id="5" name="Picture 4">
             <a:extLst>
               <a:ext uri="{FF2B5EF4-FFF2-40B4-BE49-F238E27FC236}">
-                <a16:creationId xmlns:a16="http://schemas.microsoft.com/office/drawing/2014/main" id="{EF2A2686-89A1-E522-D85D-E5262133ABBB}"/>
+                <a16:creationId xmlns:a16="http://schemas.microsoft.com/office/drawing/2014/main" id="{823976C6-C9BC-9E96-7317-9AA833E267E8}"/>
               </a:ext>
             </a:extLst>
           </p:cNvPr>
@@ -11196,8 +11196,8 @@
         </p:blipFill>
         <p:spPr>
           <a:xfrm>
-            <a:off x="988542" y="2690091"/>
-            <a:ext cx="4906483" cy="3139001"/>
+            <a:off x="6296976" y="2673773"/>
+            <a:ext cx="4877790" cy="3139002"/>
           </a:xfrm>
           <a:prstGeom prst="rect">
             <a:avLst/>
@@ -11206,10 +11206,10 @@
       </p:pic>
       <p:pic>
         <p:nvPicPr>
-          <p:cNvPr id="22" name="Picture 21">
+          <p:cNvPr id="6" name="Picture 5">
             <a:extLst>
               <a:ext uri="{FF2B5EF4-FFF2-40B4-BE49-F238E27FC236}">
-                <a16:creationId xmlns:a16="http://schemas.microsoft.com/office/drawing/2014/main" id="{8B46C2C0-4001-8488-94C5-C7D79A7F1ACF}"/>
+                <a16:creationId xmlns:a16="http://schemas.microsoft.com/office/drawing/2014/main" id="{DB81B034-99B9-7C99-5477-09214717538A}"/>
               </a:ext>
             </a:extLst>
           </p:cNvPr>
@@ -11226,8 +11226,8 @@
         </p:blipFill>
         <p:spPr>
           <a:xfrm>
-            <a:off x="6296976" y="2690090"/>
-            <a:ext cx="4906483" cy="3139001"/>
+            <a:off x="1017235" y="2673773"/>
+            <a:ext cx="4877790" cy="3139001"/>
           </a:xfrm>
           <a:prstGeom prst="rect">
             <a:avLst/>
@@ -11445,10 +11445,10 @@
       </p:sp>
       <p:pic>
         <p:nvPicPr>
-          <p:cNvPr id="3" name="Picture 2">
+          <p:cNvPr id="11" name="Picture 10">
             <a:extLst>
               <a:ext uri="{FF2B5EF4-FFF2-40B4-BE49-F238E27FC236}">
-                <a16:creationId xmlns:a16="http://schemas.microsoft.com/office/drawing/2014/main" id="{45D91724-505E-8BE6-1C31-97951CFADEF9}"/>
+                <a16:creationId xmlns:a16="http://schemas.microsoft.com/office/drawing/2014/main" id="{EA2A85A6-0380-70B9-2FB7-9AF8158FD1EE}"/>
               </a:ext>
             </a:extLst>
           </p:cNvPr>
@@ -11465,8 +11465,8 @@
         </p:blipFill>
         <p:spPr>
           <a:xfrm>
-            <a:off x="6446556" y="2774903"/>
-            <a:ext cx="5118106" cy="3177757"/>
+            <a:off x="6186338" y="2774903"/>
+            <a:ext cx="5141343" cy="3177757"/>
           </a:xfrm>
           <a:prstGeom prst="rect">
             <a:avLst/>
@@ -11475,10 +11475,10 @@
       </p:pic>
       <p:pic>
         <p:nvPicPr>
-          <p:cNvPr id="9" name="Picture 8">
+          <p:cNvPr id="5" name="Picture 4">
             <a:extLst>
               <a:ext uri="{FF2B5EF4-FFF2-40B4-BE49-F238E27FC236}">
-                <a16:creationId xmlns:a16="http://schemas.microsoft.com/office/drawing/2014/main" id="{6B2CEE27-6635-8298-23E4-1C44CE6BAA99}"/>
+                <a16:creationId xmlns:a16="http://schemas.microsoft.com/office/drawing/2014/main" id="{7B4CABB4-C75A-0BFA-ADEF-20E4651E7132}"/>
               </a:ext>
             </a:extLst>
           </p:cNvPr>
@@ -11495,8 +11495,8 @@
         </p:blipFill>
         <p:spPr>
           <a:xfrm>
-            <a:off x="627339" y="2774903"/>
-            <a:ext cx="5118106" cy="3177757"/>
+            <a:off x="916604" y="2774903"/>
+            <a:ext cx="5089059" cy="3177757"/>
           </a:xfrm>
           <a:prstGeom prst="rect">
             <a:avLst/>
@@ -11703,10 +11703,10 @@
       </p:sp>
       <p:pic>
         <p:nvPicPr>
-          <p:cNvPr id="9" name="Picture 8">
+          <p:cNvPr id="23" name="Picture 22">
             <a:extLst>
               <a:ext uri="{FF2B5EF4-FFF2-40B4-BE49-F238E27FC236}">
-                <a16:creationId xmlns:a16="http://schemas.microsoft.com/office/drawing/2014/main" id="{168C3A1E-1106-263C-EB90-C135DB2819CA}"/>
+                <a16:creationId xmlns:a16="http://schemas.microsoft.com/office/drawing/2014/main" id="{6036284D-8F17-DFFD-A450-E9BEC0450934}"/>
               </a:ext>
             </a:extLst>
           </p:cNvPr>
@@ -11723,8 +11723,8 @@
         </p:blipFill>
         <p:spPr>
           <a:xfrm>
-            <a:off x="6296975" y="2420707"/>
-            <a:ext cx="5116368" cy="3273279"/>
+            <a:off x="6296976" y="2435951"/>
+            <a:ext cx="5116368" cy="3258036"/>
           </a:xfrm>
           <a:prstGeom prst="rect">
             <a:avLst/>
@@ -11733,10 +11733,10 @@
       </p:pic>
       <p:pic>
         <p:nvPicPr>
-          <p:cNvPr id="11" name="Picture 10">
+          <p:cNvPr id="5" name="Picture 4">
             <a:extLst>
               <a:ext uri="{FF2B5EF4-FFF2-40B4-BE49-F238E27FC236}">
-                <a16:creationId xmlns:a16="http://schemas.microsoft.com/office/drawing/2014/main" id="{272AEDD4-B2EA-437D-C7C3-538567DFE2AA}"/>
+                <a16:creationId xmlns:a16="http://schemas.microsoft.com/office/drawing/2014/main" id="{307EBC76-D3BF-94FA-9783-70DB3706937C}"/>
               </a:ext>
             </a:extLst>
           </p:cNvPr>
@@ -11753,8 +11753,8 @@
         </p:blipFill>
         <p:spPr>
           <a:xfrm>
-            <a:off x="778658" y="2420707"/>
-            <a:ext cx="5116368" cy="3273279"/>
+            <a:off x="778657" y="2401454"/>
+            <a:ext cx="5116368" cy="3292533"/>
           </a:xfrm>
           <a:prstGeom prst="rect">
             <a:avLst/>
@@ -11977,10 +11977,10 @@
       </p:sp>
       <p:pic>
         <p:nvPicPr>
-          <p:cNvPr id="10" name="Picture 9">
+          <p:cNvPr id="9" name="Picture 8">
             <a:extLst>
               <a:ext uri="{FF2B5EF4-FFF2-40B4-BE49-F238E27FC236}">
-                <a16:creationId xmlns:a16="http://schemas.microsoft.com/office/drawing/2014/main" id="{E0E71B6E-0645-A381-B1AA-6DA5AB7B94CA}"/>
+                <a16:creationId xmlns:a16="http://schemas.microsoft.com/office/drawing/2014/main" id="{07D5CAB4-58AE-A513-8C65-9105D6AD4F88}"/>
               </a:ext>
             </a:extLst>
           </p:cNvPr>
@@ -11997,8 +11997,8 @@
         </p:blipFill>
         <p:spPr>
           <a:xfrm>
-            <a:off x="325633" y="2490760"/>
-            <a:ext cx="5377670" cy="3400677"/>
+            <a:off x="6488697" y="2490761"/>
+            <a:ext cx="5408756" cy="3400677"/>
           </a:xfrm>
           <a:prstGeom prst="rect">
             <a:avLst/>
@@ -12007,10 +12007,10 @@
       </p:pic>
       <p:pic>
         <p:nvPicPr>
-          <p:cNvPr id="12" name="Picture 11">
+          <p:cNvPr id="6" name="Picture 5">
             <a:extLst>
               <a:ext uri="{FF2B5EF4-FFF2-40B4-BE49-F238E27FC236}">
-                <a16:creationId xmlns:a16="http://schemas.microsoft.com/office/drawing/2014/main" id="{37154971-12AA-150D-B3B0-24695583168F}"/>
+                <a16:creationId xmlns:a16="http://schemas.microsoft.com/office/drawing/2014/main" id="{BEDD5E30-D166-9B24-31E0-9EACBA4DC86D}"/>
               </a:ext>
             </a:extLst>
           </p:cNvPr>
@@ -12027,8 +12027,8 @@
         </p:blipFill>
         <p:spPr>
           <a:xfrm>
-            <a:off x="6488699" y="2490759"/>
-            <a:ext cx="5377670" cy="3400677"/>
+            <a:off x="350502" y="2490761"/>
+            <a:ext cx="5352803" cy="3400677"/>
           </a:xfrm>
           <a:prstGeom prst="rect">
             <a:avLst/>
@@ -12246,10 +12246,10 @@
       </p:sp>
       <p:pic>
         <p:nvPicPr>
-          <p:cNvPr id="3" name="Picture 2">
+          <p:cNvPr id="6" name="Picture 5">
             <a:extLst>
               <a:ext uri="{FF2B5EF4-FFF2-40B4-BE49-F238E27FC236}">
-                <a16:creationId xmlns:a16="http://schemas.microsoft.com/office/drawing/2014/main" id="{BEC10E32-635D-E222-47C8-662DCC6367A2}"/>
+                <a16:creationId xmlns:a16="http://schemas.microsoft.com/office/drawing/2014/main" id="{A2263FC1-F432-C367-4E63-59804BCF378E}"/>
               </a:ext>
             </a:extLst>
           </p:cNvPr>
@@ -12266,8 +12266,8 @@
         </p:blipFill>
         <p:spPr>
           <a:xfrm>
-            <a:off x="6393710" y="2631378"/>
-            <a:ext cx="5340063" cy="3260061"/>
+            <a:off x="6393710" y="2583381"/>
+            <a:ext cx="5340063" cy="3308058"/>
           </a:xfrm>
           <a:prstGeom prst="rect">
             <a:avLst/>
@@ -12276,10 +12276,10 @@
       </p:pic>
       <p:pic>
         <p:nvPicPr>
-          <p:cNvPr id="8" name="Picture 7">
+          <p:cNvPr id="5" name="Picture 4">
             <a:extLst>
               <a:ext uri="{FF2B5EF4-FFF2-40B4-BE49-F238E27FC236}">
-                <a16:creationId xmlns:a16="http://schemas.microsoft.com/office/drawing/2014/main" id="{0379EB7C-DAD5-3898-6188-EB95F94F27DF}"/>
+                <a16:creationId xmlns:a16="http://schemas.microsoft.com/office/drawing/2014/main" id="{99982CF8-9DEC-DC74-2037-D87916B396CC}"/>
               </a:ext>
             </a:extLst>
           </p:cNvPr>
@@ -12296,8 +12296,8 @@
         </p:blipFill>
         <p:spPr>
           <a:xfrm>
-            <a:off x="458227" y="2631377"/>
-            <a:ext cx="5340063" cy="3260061"/>
+            <a:off x="458227" y="2583381"/>
+            <a:ext cx="5340065" cy="3308058"/>
           </a:xfrm>
           <a:prstGeom prst="rect">
             <a:avLst/>
@@ -12515,10 +12515,10 @@
       </p:sp>
       <p:pic>
         <p:nvPicPr>
-          <p:cNvPr id="9" name="Picture 8">
+          <p:cNvPr id="19" name="Picture 18">
             <a:extLst>
               <a:ext uri="{FF2B5EF4-FFF2-40B4-BE49-F238E27FC236}">
-                <a16:creationId xmlns:a16="http://schemas.microsoft.com/office/drawing/2014/main" id="{41A54DB7-348D-99D7-BAEB-5FA91F666A76}"/>
+                <a16:creationId xmlns:a16="http://schemas.microsoft.com/office/drawing/2014/main" id="{B0B7626F-B325-FE99-2ACC-D2CD39395A9A}"/>
               </a:ext>
             </a:extLst>
           </p:cNvPr>
@@ -12535,8 +12535,8 @@
         </p:blipFill>
         <p:spPr>
           <a:xfrm>
-            <a:off x="6559268" y="2549412"/>
-            <a:ext cx="5212994" cy="3335097"/>
+            <a:off x="6559265" y="2549414"/>
+            <a:ext cx="5182508" cy="3335097"/>
           </a:xfrm>
           <a:prstGeom prst="rect">
             <a:avLst/>
@@ -12545,10 +12545,10 @@
       </p:pic>
       <p:pic>
         <p:nvPicPr>
-          <p:cNvPr id="11" name="Picture 10">
+          <p:cNvPr id="6" name="Picture 5">
             <a:extLst>
               <a:ext uri="{FF2B5EF4-FFF2-40B4-BE49-F238E27FC236}">
-                <a16:creationId xmlns:a16="http://schemas.microsoft.com/office/drawing/2014/main" id="{11243EE1-7DC5-56AC-A901-A6A318906A6D}"/>
+                <a16:creationId xmlns:a16="http://schemas.microsoft.com/office/drawing/2014/main" id="{796D097D-0C64-8A9A-5A11-394C77AD32D7}"/>
               </a:ext>
             </a:extLst>
           </p:cNvPr>
@@ -12565,8 +12565,8 @@
         </p:blipFill>
         <p:spPr>
           <a:xfrm>
-            <a:off x="419738" y="2549412"/>
-            <a:ext cx="5212994" cy="3335097"/>
+            <a:off x="450228" y="2549414"/>
+            <a:ext cx="5182509" cy="3335097"/>
           </a:xfrm>
           <a:prstGeom prst="rect">
             <a:avLst/>
@@ -13317,10 +13317,10 @@
       </p:sp>
       <p:pic>
         <p:nvPicPr>
-          <p:cNvPr id="3" name="Picture 2">
+          <p:cNvPr id="19" name="Picture 18">
             <a:extLst>
               <a:ext uri="{FF2B5EF4-FFF2-40B4-BE49-F238E27FC236}">
-                <a16:creationId xmlns:a16="http://schemas.microsoft.com/office/drawing/2014/main" id="{8516AFA2-627E-F1B2-DDC8-E32D61E47AC3}"/>
+                <a16:creationId xmlns:a16="http://schemas.microsoft.com/office/drawing/2014/main" id="{B665F59D-51B9-D67E-B380-E4EA71ADCFDB}"/>
               </a:ext>
             </a:extLst>
           </p:cNvPr>
@@ -13337,8 +13337,8 @@
         </p:blipFill>
         <p:spPr>
           <a:xfrm>
-            <a:off x="6370397" y="2561039"/>
-            <a:ext cx="5247331" cy="3357064"/>
+            <a:off x="6370397" y="2542495"/>
+            <a:ext cx="5302890" cy="3376811"/>
           </a:xfrm>
           <a:prstGeom prst="rect">
             <a:avLst/>
@@ -13347,10 +13347,10 @@
       </p:pic>
       <p:pic>
         <p:nvPicPr>
-          <p:cNvPr id="7" name="Picture 6">
+          <p:cNvPr id="5" name="Picture 4">
             <a:extLst>
               <a:ext uri="{FF2B5EF4-FFF2-40B4-BE49-F238E27FC236}">
-                <a16:creationId xmlns:a16="http://schemas.microsoft.com/office/drawing/2014/main" id="{579C07B1-FCAA-5761-860C-D3E1BB41155B}"/>
+                <a16:creationId xmlns:a16="http://schemas.microsoft.com/office/drawing/2014/main" id="{E26D387F-7E2E-B908-A850-E5097317466A}"/>
               </a:ext>
             </a:extLst>
           </p:cNvPr>
@@ -13367,8 +13367,8 @@
         </p:blipFill>
         <p:spPr>
           <a:xfrm>
-            <a:off x="574275" y="2561039"/>
-            <a:ext cx="5247330" cy="3357064"/>
+            <a:off x="574275" y="2542495"/>
+            <a:ext cx="5247330" cy="3376811"/>
           </a:xfrm>
           <a:prstGeom prst="rect">
             <a:avLst/>
@@ -13586,10 +13586,10 @@
       </p:sp>
       <p:pic>
         <p:nvPicPr>
-          <p:cNvPr id="9" name="Picture 8">
+          <p:cNvPr id="13" name="Picture 12">
             <a:extLst>
               <a:ext uri="{FF2B5EF4-FFF2-40B4-BE49-F238E27FC236}">
-                <a16:creationId xmlns:a16="http://schemas.microsoft.com/office/drawing/2014/main" id="{3E2E45C0-DCED-00DE-F08C-5EF7DA14C132}"/>
+                <a16:creationId xmlns:a16="http://schemas.microsoft.com/office/drawing/2014/main" id="{E893B3D5-074D-8C1F-0C52-A536699B31BB}"/>
               </a:ext>
             </a:extLst>
           </p:cNvPr>
@@ -13606,8 +13606,8 @@
         </p:blipFill>
         <p:spPr>
           <a:xfrm>
-            <a:off x="587727" y="2598110"/>
-            <a:ext cx="5332487" cy="3360450"/>
+            <a:off x="6271789" y="2546717"/>
+            <a:ext cx="5301769" cy="3411844"/>
           </a:xfrm>
           <a:prstGeom prst="rect">
             <a:avLst/>
@@ -13616,10 +13616,10 @@
       </p:pic>
       <p:pic>
         <p:nvPicPr>
-          <p:cNvPr id="11" name="Picture 10">
+          <p:cNvPr id="6" name="Picture 5">
             <a:extLst>
               <a:ext uri="{FF2B5EF4-FFF2-40B4-BE49-F238E27FC236}">
-                <a16:creationId xmlns:a16="http://schemas.microsoft.com/office/drawing/2014/main" id="{366F012A-2541-07B0-B8F2-2D0CB4476E4A}"/>
+                <a16:creationId xmlns:a16="http://schemas.microsoft.com/office/drawing/2014/main" id="{36F40B0A-B005-DD72-FDD9-E2BED75E4E0C}"/>
               </a:ext>
             </a:extLst>
           </p:cNvPr>
@@ -13636,8 +13636,8 @@
         </p:blipFill>
         <p:spPr>
           <a:xfrm>
-            <a:off x="6271786" y="2598110"/>
-            <a:ext cx="5332487" cy="3360450"/>
+            <a:off x="618443" y="2546717"/>
+            <a:ext cx="5301769" cy="3411844"/>
           </a:xfrm>
           <a:prstGeom prst="rect">
             <a:avLst/>
@@ -13889,10 +13889,10 @@
       </p:sp>
       <p:pic>
         <p:nvPicPr>
-          <p:cNvPr id="3" name="Picture 2">
+          <p:cNvPr id="12" name="Picture 11">
             <a:extLst>
               <a:ext uri="{FF2B5EF4-FFF2-40B4-BE49-F238E27FC236}">
-                <a16:creationId xmlns:a16="http://schemas.microsoft.com/office/drawing/2014/main" id="{F2E899C8-BE21-F46B-F2E0-1E1ED9F5135B}"/>
+                <a16:creationId xmlns:a16="http://schemas.microsoft.com/office/drawing/2014/main" id="{E9D4212B-D1B2-C1DB-A9BE-DB2C73E4E805}"/>
               </a:ext>
             </a:extLst>
           </p:cNvPr>
@@ -13909,8 +13909,8 @@
         </p:blipFill>
         <p:spPr>
           <a:xfrm>
-            <a:off x="6552050" y="2491232"/>
-            <a:ext cx="5371372" cy="3436421"/>
+            <a:off x="6296976" y="2471017"/>
+            <a:ext cx="5371373" cy="3420421"/>
           </a:xfrm>
           <a:prstGeom prst="rect">
             <a:avLst/>
@@ -13919,10 +13919,10 @@
       </p:pic>
       <p:pic>
         <p:nvPicPr>
-          <p:cNvPr id="7" name="Picture 6">
+          <p:cNvPr id="5" name="Picture 4">
             <a:extLst>
               <a:ext uri="{FF2B5EF4-FFF2-40B4-BE49-F238E27FC236}">
-                <a16:creationId xmlns:a16="http://schemas.microsoft.com/office/drawing/2014/main" id="{E62CEADA-9263-B9DB-82B5-E7F5157F0BF4}"/>
+                <a16:creationId xmlns:a16="http://schemas.microsoft.com/office/drawing/2014/main" id="{2C37F535-CEA2-254E-2799-EE9EBF7F744A}"/>
               </a:ext>
             </a:extLst>
           </p:cNvPr>
@@ -13939,8 +13939,8 @@
         </p:blipFill>
         <p:spPr>
           <a:xfrm>
-            <a:off x="268578" y="2491232"/>
-            <a:ext cx="5371371" cy="3436421"/>
+            <a:off x="268580" y="2471017"/>
+            <a:ext cx="5371372" cy="3456636"/>
           </a:xfrm>
           <a:prstGeom prst="rect">
             <a:avLst/>
@@ -15749,10 +15749,10 @@
       </p:sp>
       <p:pic>
         <p:nvPicPr>
-          <p:cNvPr id="6" name="Picture 5">
+          <p:cNvPr id="19" name="Picture 18">
             <a:extLst>
               <a:ext uri="{FF2B5EF4-FFF2-40B4-BE49-F238E27FC236}">
-                <a16:creationId xmlns:a16="http://schemas.microsoft.com/office/drawing/2014/main" id="{80EEFA87-C938-C2D2-0ED6-E1CBDC5832FB}"/>
+                <a16:creationId xmlns:a16="http://schemas.microsoft.com/office/drawing/2014/main" id="{DE562C6B-89AA-A159-3461-108938311981}"/>
               </a:ext>
             </a:extLst>
           </p:cNvPr>
@@ -15769,8 +15769,8 @@
         </p:blipFill>
         <p:spPr>
           <a:xfrm>
-            <a:off x="6457109" y="2611917"/>
-            <a:ext cx="4863839" cy="3111719"/>
+            <a:off x="6457107" y="2539077"/>
+            <a:ext cx="5017769" cy="3195250"/>
           </a:xfrm>
           <a:prstGeom prst="rect">
             <a:avLst/>
@@ -15779,10 +15779,10 @@
       </p:pic>
       <p:pic>
         <p:nvPicPr>
-          <p:cNvPr id="9" name="Picture 8">
+          <p:cNvPr id="7" name="Picture 6">
             <a:extLst>
               <a:ext uri="{FF2B5EF4-FFF2-40B4-BE49-F238E27FC236}">
-                <a16:creationId xmlns:a16="http://schemas.microsoft.com/office/drawing/2014/main" id="{5646827C-F327-FF4B-DB29-2E7FCA25885B}"/>
+                <a16:creationId xmlns:a16="http://schemas.microsoft.com/office/drawing/2014/main" id="{A4FD2C72-4BBD-E1AD-7F50-EA113C719F3E}"/>
               </a:ext>
             </a:extLst>
           </p:cNvPr>
@@ -15799,8 +15799,8 @@
         </p:blipFill>
         <p:spPr>
           <a:xfrm>
-            <a:off x="871052" y="2611916"/>
-            <a:ext cx="4863839" cy="3111719"/>
+            <a:off x="717124" y="2494554"/>
+            <a:ext cx="5017769" cy="3229082"/>
           </a:xfrm>
           <a:prstGeom prst="rect">
             <a:avLst/>
@@ -16318,10 +16318,10 @@
       </p:sp>
       <p:pic>
         <p:nvPicPr>
-          <p:cNvPr id="3" name="Picture 2">
+          <p:cNvPr id="15" name="Picture 14">
             <a:extLst>
               <a:ext uri="{FF2B5EF4-FFF2-40B4-BE49-F238E27FC236}">
-                <a16:creationId xmlns:a16="http://schemas.microsoft.com/office/drawing/2014/main" id="{7C42A09E-5B51-A226-01E6-B278538455F6}"/>
+                <a16:creationId xmlns:a16="http://schemas.microsoft.com/office/drawing/2014/main" id="{5794562C-D8E4-D596-F967-B4F34891E3D3}"/>
               </a:ext>
             </a:extLst>
           </p:cNvPr>
@@ -16338,8 +16338,8 @@
         </p:blipFill>
         <p:spPr>
           <a:xfrm>
-            <a:off x="6681437" y="2959213"/>
-            <a:ext cx="4761151" cy="3046023"/>
+            <a:off x="6670301" y="2959213"/>
+            <a:ext cx="4783426" cy="3046023"/>
           </a:xfrm>
           <a:prstGeom prst="rect">
             <a:avLst/>
@@ -16348,10 +16348,10 @@
       </p:pic>
       <p:pic>
         <p:nvPicPr>
-          <p:cNvPr id="6" name="Picture 5">
+          <p:cNvPr id="12" name="Picture 11">
             <a:extLst>
               <a:ext uri="{FF2B5EF4-FFF2-40B4-BE49-F238E27FC236}">
-                <a16:creationId xmlns:a16="http://schemas.microsoft.com/office/drawing/2014/main" id="{5DE3E277-0BC5-6275-BD6E-1FC35FAAA41D}"/>
+                <a16:creationId xmlns:a16="http://schemas.microsoft.com/office/drawing/2014/main" id="{9024BE88-EE01-5C73-E0C6-28454843F484}"/>
               </a:ext>
             </a:extLst>
           </p:cNvPr>
@@ -16368,8 +16368,8 @@
         </p:blipFill>
         <p:spPr>
           <a:xfrm>
-            <a:off x="746767" y="2959213"/>
-            <a:ext cx="4761151" cy="3046023"/>
+            <a:off x="738272" y="2930362"/>
+            <a:ext cx="4778141" cy="3074874"/>
           </a:xfrm>
           <a:prstGeom prst="rect">
             <a:avLst/>
